--- a/exports/pptx/lessons/middle-module-07-eleven-multiplication/day-05-speed-day.pptx
+++ b/exports/pptx/lessons/middle-module-07-eleven-multiplication/day-05-speed-day.pptx
@@ -18,9 +18,12 @@
     <p:sldId id="266" r:id="rId12"/>
     <p:sldId id="267" r:id="rId13"/>
     <p:sldId id="268" r:id="rId14"/>
+    <p:sldId id="269" r:id="rId15"/>
+    <p:sldId id="270" r:id="rId16"/>
+    <p:sldId id="271" r:id="rId17"/>
   </p:sldIdLst>
   <p:notesMasterIdLst>
-    <p:notesMasterId r:id="rId15"/>
+    <p:notesMasterId r:id="rId18"/>
   </p:notesMasterIdLst>
   <p:sldSz cx="9144000" cy="5143500"/>
   <p:notesSz cx="5143500" cy="9144000"/>
@@ -890,6 +893,270 @@
             <a:fld id="{F7021451-1387-4CA6-816F-3879F97B5CBC}" type="slidenum">
               <a:rPr lang="en-US"/>
               <a:t>13</a:t>
+            </a:fld>
+            <a:endParaRPr lang="en-US"/>
+          </a:p>
+        </p:txBody>
+      </p:sp>
+    </p:spTree>
+    <p:extLst>
+      <p:ext uri="{BB962C8B-B14F-4D97-AF65-F5344CB8AC3E}">
+        <p14:creationId xmlns:p14="http://schemas.microsoft.com/office/powerpoint/2010/main" val="1024086991"/>
+      </p:ext>
+    </p:extLst>
+  </p:cSld>
+  <p:clrMapOvr>
+    <a:masterClrMapping/>
+  </p:clrMapOvr>
+</p:notes>
+</file>
+
+<file path=ppt/notesSlides/notesSlide14.xml><?xml version="1.0" encoding="utf-8"?>
+<p:notes xmlns:a="http://schemas.openxmlformats.org/drawingml/2006/main" xmlns:r="http://schemas.openxmlformats.org/officeDocument/2006/relationships" xmlns:p="http://schemas.openxmlformats.org/presentationml/2006/main">
+  <p:cSld>
+    <p:spTree>
+      <p:nvGrpSpPr>
+        <p:cNvPr id="1" name=""/>
+        <p:cNvGrpSpPr/>
+        <p:nvPr/>
+      </p:nvGrpSpPr>
+      <p:grpSpPr>
+        <a:xfrm>
+          <a:off x="0" y="0"/>
+          <a:ext cx="0" cy="0"/>
+          <a:chOff x="0" y="0"/>
+          <a:chExt cx="0" cy="0"/>
+        </a:xfrm>
+      </p:grpSpPr>
+      <p:sp>
+        <p:nvSpPr>
+          <p:cNvPr id="2" name="Slide Image Placeholder 1"/>
+          <p:cNvSpPr>
+            <a:spLocks noGrp="1" noRot="1" noChangeAspect="1"/>
+          </p:cNvSpPr>
+          <p:nvPr>
+            <p:ph type="sldImg"/>
+          </p:nvPr>
+        </p:nvSpPr>
+        <p:spPr/>
+      </p:sp>
+      <p:sp>
+        <p:nvSpPr>
+          <p:cNvPr id="3" name="Notes Placeholder 2"/>
+          <p:cNvSpPr>
+            <a:spLocks noGrp="1"/>
+          </p:cNvSpPr>
+          <p:nvPr>
+            <p:ph type="body" idx="1"/>
+          </p:nvPr>
+        </p:nvSpPr>
+        <p:spPr/>
+        <p:txBody>
+          <a:bodyPr/>
+          <a:lstStyle/>
+          <a:p>
+            <a:r>
+              <a:rPr lang="en-US" dirty="0"/>
+              <a:t/>
+            </a:r>
+            <a:endParaRPr lang="en-US" dirty="0"/>
+          </a:p>
+        </p:txBody>
+      </p:sp>
+      <p:sp>
+        <p:nvSpPr>
+          <p:cNvPr id="4" name="Slide Number Placeholder 3"/>
+          <p:cNvSpPr>
+            <a:spLocks noGrp="1"/>
+          </p:cNvSpPr>
+          <p:nvPr>
+            <p:ph type="sldNum" sz="quarter" idx="10"/>
+          </p:nvPr>
+        </p:nvSpPr>
+        <p:spPr/>
+        <p:txBody>
+          <a:bodyPr/>
+          <a:lstStyle/>
+          <a:p>
+            <a:fld id="{F7021451-1387-4CA6-816F-3879F97B5CBC}" type="slidenum">
+              <a:rPr lang="en-US"/>
+              <a:t>14</a:t>
+            </a:fld>
+            <a:endParaRPr lang="en-US"/>
+          </a:p>
+        </p:txBody>
+      </p:sp>
+    </p:spTree>
+    <p:extLst>
+      <p:ext uri="{BB962C8B-B14F-4D97-AF65-F5344CB8AC3E}">
+        <p14:creationId xmlns:p14="http://schemas.microsoft.com/office/powerpoint/2010/main" val="1024086991"/>
+      </p:ext>
+    </p:extLst>
+  </p:cSld>
+  <p:clrMapOvr>
+    <a:masterClrMapping/>
+  </p:clrMapOvr>
+</p:notes>
+</file>
+
+<file path=ppt/notesSlides/notesSlide15.xml><?xml version="1.0" encoding="utf-8"?>
+<p:notes xmlns:a="http://schemas.openxmlformats.org/drawingml/2006/main" xmlns:r="http://schemas.openxmlformats.org/officeDocument/2006/relationships" xmlns:p="http://schemas.openxmlformats.org/presentationml/2006/main">
+  <p:cSld>
+    <p:spTree>
+      <p:nvGrpSpPr>
+        <p:cNvPr id="1" name=""/>
+        <p:cNvGrpSpPr/>
+        <p:nvPr/>
+      </p:nvGrpSpPr>
+      <p:grpSpPr>
+        <a:xfrm>
+          <a:off x="0" y="0"/>
+          <a:ext cx="0" cy="0"/>
+          <a:chOff x="0" y="0"/>
+          <a:chExt cx="0" cy="0"/>
+        </a:xfrm>
+      </p:grpSpPr>
+      <p:sp>
+        <p:nvSpPr>
+          <p:cNvPr id="2" name="Slide Image Placeholder 1"/>
+          <p:cNvSpPr>
+            <a:spLocks noGrp="1" noRot="1" noChangeAspect="1"/>
+          </p:cNvSpPr>
+          <p:nvPr>
+            <p:ph type="sldImg"/>
+          </p:nvPr>
+        </p:nvSpPr>
+        <p:spPr/>
+      </p:sp>
+      <p:sp>
+        <p:nvSpPr>
+          <p:cNvPr id="3" name="Notes Placeholder 2"/>
+          <p:cNvSpPr>
+            <a:spLocks noGrp="1"/>
+          </p:cNvSpPr>
+          <p:nvPr>
+            <p:ph type="body" idx="1"/>
+          </p:nvPr>
+        </p:nvSpPr>
+        <p:spPr/>
+        <p:txBody>
+          <a:bodyPr/>
+          <a:lstStyle/>
+          <a:p>
+            <a:r>
+              <a:rPr lang="en-US" dirty="0"/>
+              <a:t/>
+            </a:r>
+            <a:endParaRPr lang="en-US" dirty="0"/>
+          </a:p>
+        </p:txBody>
+      </p:sp>
+      <p:sp>
+        <p:nvSpPr>
+          <p:cNvPr id="4" name="Slide Number Placeholder 3"/>
+          <p:cNvSpPr>
+            <a:spLocks noGrp="1"/>
+          </p:cNvSpPr>
+          <p:nvPr>
+            <p:ph type="sldNum" sz="quarter" idx="10"/>
+          </p:nvPr>
+        </p:nvSpPr>
+        <p:spPr/>
+        <p:txBody>
+          <a:bodyPr/>
+          <a:lstStyle/>
+          <a:p>
+            <a:fld id="{F7021451-1387-4CA6-816F-3879F97B5CBC}" type="slidenum">
+              <a:rPr lang="en-US"/>
+              <a:t>15</a:t>
+            </a:fld>
+            <a:endParaRPr lang="en-US"/>
+          </a:p>
+        </p:txBody>
+      </p:sp>
+    </p:spTree>
+    <p:extLst>
+      <p:ext uri="{BB962C8B-B14F-4D97-AF65-F5344CB8AC3E}">
+        <p14:creationId xmlns:p14="http://schemas.microsoft.com/office/powerpoint/2010/main" val="1024086991"/>
+      </p:ext>
+    </p:extLst>
+  </p:cSld>
+  <p:clrMapOvr>
+    <a:masterClrMapping/>
+  </p:clrMapOvr>
+</p:notes>
+</file>
+
+<file path=ppt/notesSlides/notesSlide16.xml><?xml version="1.0" encoding="utf-8"?>
+<p:notes xmlns:a="http://schemas.openxmlformats.org/drawingml/2006/main" xmlns:r="http://schemas.openxmlformats.org/officeDocument/2006/relationships" xmlns:p="http://schemas.openxmlformats.org/presentationml/2006/main">
+  <p:cSld>
+    <p:spTree>
+      <p:nvGrpSpPr>
+        <p:cNvPr id="1" name=""/>
+        <p:cNvGrpSpPr/>
+        <p:nvPr/>
+      </p:nvGrpSpPr>
+      <p:grpSpPr>
+        <a:xfrm>
+          <a:off x="0" y="0"/>
+          <a:ext cx="0" cy="0"/>
+          <a:chOff x="0" y="0"/>
+          <a:chExt cx="0" cy="0"/>
+        </a:xfrm>
+      </p:grpSpPr>
+      <p:sp>
+        <p:nvSpPr>
+          <p:cNvPr id="2" name="Slide Image Placeholder 1"/>
+          <p:cNvSpPr>
+            <a:spLocks noGrp="1" noRot="1" noChangeAspect="1"/>
+          </p:cNvSpPr>
+          <p:nvPr>
+            <p:ph type="sldImg"/>
+          </p:nvPr>
+        </p:nvSpPr>
+        <p:spPr/>
+      </p:sp>
+      <p:sp>
+        <p:nvSpPr>
+          <p:cNvPr id="3" name="Notes Placeholder 2"/>
+          <p:cNvSpPr>
+            <a:spLocks noGrp="1"/>
+          </p:cNvSpPr>
+          <p:nvPr>
+            <p:ph type="body" idx="1"/>
+          </p:nvPr>
+        </p:nvSpPr>
+        <p:spPr/>
+        <p:txBody>
+          <a:bodyPr/>
+          <a:lstStyle/>
+          <a:p>
+            <a:r>
+              <a:rPr lang="en-US" dirty="0"/>
+              <a:t/>
+            </a:r>
+            <a:endParaRPr lang="en-US" dirty="0"/>
+          </a:p>
+        </p:txBody>
+      </p:sp>
+      <p:sp>
+        <p:nvSpPr>
+          <p:cNvPr id="4" name="Slide Number Placeholder 3"/>
+          <p:cNvSpPr>
+            <a:spLocks noGrp="1"/>
+          </p:cNvSpPr>
+          <p:nvPr>
+            <p:ph type="sldNum" sz="quarter" idx="10"/>
+          </p:nvPr>
+        </p:nvSpPr>
+        <p:spPr/>
+        <p:txBody>
+          <a:bodyPr/>
+          <a:lstStyle/>
+          <a:p>
+            <a:fld id="{F7021451-1387-4CA6-816F-3879F97B5CBC}" type="slidenum">
+              <a:rPr lang="en-US"/>
+              <a:t>16</a:t>
             </a:fld>
             <a:endParaRPr lang="en-US"/>
           </a:p>
@@ -2235,102 +2502,6 @@
         </p:nvSpPr>
         <p:spPr>
           <a:xfrm>
-            <a:off x="406301" y="1223963"/>
-            <a:ext cx="8498026" cy="274290"/>
-          </a:xfrm>
-          <a:prstGeom prst="rect">
-            <a:avLst/>
-          </a:prstGeom>
-          <a:noFill/>
-          <a:ln/>
-        </p:spPr>
-        <p:txBody>
-          <a:bodyPr wrap="square" lIns="0" tIns="0" rIns="0" bIns="0" rtlCol="0" anchor="t"/>
-          <a:lstStyle/>
-          <a:p>
-            <a:pPr algn="l" indent="0" marL="0">
-              <a:lnSpc>
-                <a:spcPts val="2160"/>
-              </a:lnSpc>
-              <a:spcBef>
-                <a:spcPts val="600"/>
-              </a:spcBef>
-              <a:spcAft>
-                <a:spcPts val="800"/>
-              </a:spcAft>
-              <a:buNone/>
-            </a:pPr>
-            <a:r>
-              <a:rPr lang="en-US" sz="1800" b="1" dirty="0">
-                <a:solidFill>
-                  <a:srgbClr val="FE4447"/>
-                </a:solidFill>
-                <a:latin typeface="Georgia" pitchFamily="34" charset="0"/>
-                <a:ea typeface="Georgia" pitchFamily="34" charset="-122"/>
-                <a:cs typeface="Georgia" pitchFamily="34" charset="-120"/>
-              </a:rPr>
-              <a:t>Learning objective</a:t>
-            </a:r>
-            <a:endParaRPr lang="en-US" sz="1800" dirty="0"/>
-          </a:p>
-        </p:txBody>
-      </p:sp>
-      <p:sp>
-        <p:nvSpPr>
-          <p:cNvPr id="6" name="Text 4"/>
-          <p:cNvSpPr/>
-          <p:nvPr/>
-        </p:nvSpPr>
-        <p:spPr>
-          <a:xfrm>
-            <a:off x="406301" y="1637854"/>
-            <a:ext cx="8498026" cy="426541"/>
-          </a:xfrm>
-          <a:prstGeom prst="rect">
-            <a:avLst/>
-          </a:prstGeom>
-          <a:noFill/>
-          <a:ln/>
-        </p:spPr>
-        <p:txBody>
-          <a:bodyPr wrap="square" lIns="0" tIns="0" rIns="0" bIns="0" rtlCol="0" anchor="t"/>
-          <a:lstStyle/>
-          <a:p>
-            <a:pPr algn="l" indent="0" marL="0">
-              <a:lnSpc>
-                <a:spcPts val="1680"/>
-              </a:lnSpc>
-              <a:spcBef>
-                <a:spcPts val="300"/>
-              </a:spcBef>
-              <a:spcAft>
-                <a:spcPts val="300"/>
-              </a:spcAft>
-              <a:buNone/>
-            </a:pPr>
-            <a:r>
-              <a:rPr lang="en-US" sz="1200" dirty="0">
-                <a:solidFill>
-                  <a:srgbClr val="1C2833"/>
-                </a:solidFill>
-                <a:latin typeface="Arial" pitchFamily="34" charset="0"/>
-                <a:ea typeface="Arial" pitchFamily="34" charset="-122"/>
-                <a:cs typeface="Arial" pitchFamily="34" charset="-120"/>
-              </a:rPr>
-              <a:t>By the end of this lesson, students will retest their Day 1 baseline problem (73 × 11) using the trick, complete a paired speed race, and finish Part B of the formative quiz.</a:t>
-            </a:r>
-            <a:endParaRPr lang="en-US" sz="1200" dirty="0"/>
-          </a:p>
-        </p:txBody>
-      </p:sp>
-      <p:sp>
-        <p:nvSpPr>
-          <p:cNvPr id="7" name="Text 5"/>
-          <p:cNvSpPr/>
-          <p:nvPr/>
-        </p:nvSpPr>
-        <p:spPr>
-          <a:xfrm>
             <a:off x="406301" y="4434929"/>
             <a:ext cx="8498026" cy="213271"/>
           </a:xfrm>
@@ -2475,7 +2646,7 @@
                 <a:ea typeface="Georgia" pitchFamily="34" charset="-122"/>
                 <a:cs typeface="Georgia" pitchFamily="34" charset="-120"/>
               </a:rPr>
-              <a:t>Homework</a:t>
+              <a:t>Formative Quiz Part B (15 min)</a:t>
             </a:r>
             <a:endParaRPr lang="en-US" sz="1800" dirty="0"/>
           </a:p>
@@ -2489,8 +2660,8 @@
         </p:nvSpPr>
         <p:spPr>
           <a:xfrm>
-            <a:off x="406301" y="870942"/>
-            <a:ext cx="8498026" cy="213271"/>
+            <a:off x="634901" y="883593"/>
+            <a:ext cx="8102798" cy="525661"/>
           </a:xfrm>
           <a:prstGeom prst="rect">
             <a:avLst/>
@@ -2502,17 +2673,15 @@
           <a:bodyPr wrap="square" lIns="0" tIns="0" rIns="0" bIns="0" rtlCol="0" anchor="t"/>
           <a:lstStyle/>
           <a:p>
-            <a:pPr algn="l" indent="0" marL="0">
-              <a:lnSpc>
-                <a:spcPts val="1680"/>
-              </a:lnSpc>
-              <a:spcBef>
-                <a:spcPts val="300"/>
-              </a:spcBef>
-              <a:spcAft>
-                <a:spcPts val="300"/>
-              </a:spcAft>
-              <a:buNone/>
+            <a:pPr algn="l" marL="342900" indent="-342900">
+              <a:lnSpc>
+                <a:spcPts val="1620"/>
+              </a:lnSpc>
+              <a:spcAft>
+                <a:spcPts val="300"/>
+              </a:spcAft>
+              <a:buSzPct val="100000"/>
+              <a:buChar char="•"/>
             </a:pPr>
             <a:r>
               <a:rPr lang="en-US" sz="1200" dirty="0">
@@ -2523,7 +2692,31 @@
                 <a:ea typeface="Arial" pitchFamily="34" charset="-122"/>
                 <a:cs typeface="Arial" pitchFamily="34" charset="-120"/>
               </a:rPr>
-              <a:t>– 25-problem mixed drill sheet. Solo, untimed. Target: 100% correct.</a:t>
+              <a:t>Distribute Part B.</a:t>
+            </a:r>
+            <a:endParaRPr lang="en-US" sz="1200" dirty="0"/>
+          </a:p>
+          <a:p>
+            <a:pPr algn="l" marL="342900" indent="-342900">
+              <a:lnSpc>
+                <a:spcPts val="1620"/>
+              </a:lnSpc>
+              <a:spcAft>
+                <a:spcPts val="300"/>
+              </a:spcAft>
+              <a:buSzPct val="100000"/>
+              <a:buChar char="•"/>
+            </a:pPr>
+            <a:r>
+              <a:rPr lang="en-US" sz="1200" dirty="0">
+                <a:solidFill>
+                  <a:srgbClr val="1C2833"/>
+                </a:solidFill>
+                <a:latin typeface="Arial" pitchFamily="34" charset="0"/>
+                <a:ea typeface="Arial" pitchFamily="34" charset="-122"/>
+                <a:cs typeface="Arial" pitchFamily="34" charset="-120"/>
+              </a:rPr>
+              <a:t>8 questions, mixed 2- and 3-digit × 11, plus 2 short-answer "explain why" items.</a:t>
             </a:r>
             <a:endParaRPr lang="en-US" sz="1200" dirty="0"/>
           </a:p>
@@ -2681,7 +2874,7 @@
                 <a:ea typeface="Georgia" pitchFamily="34" charset="-122"/>
                 <a:cs typeface="Georgia" pitchFamily="34" charset="-120"/>
               </a:rPr>
-              <a:t>Differentiation</a:t>
+              <a:t>Wrap-up (2 min)</a:t>
             </a:r>
             <a:endParaRPr lang="en-US" sz="1800" dirty="0"/>
           </a:p>
@@ -2696,7 +2889,7 @@
         <p:spPr>
           <a:xfrm>
             <a:off x="634901" y="883593"/>
-            <a:ext cx="8102798" cy="731341"/>
+            <a:ext cx="8102798" cy="487561"/>
           </a:xfrm>
           <a:prstGeom prst="rect">
             <a:avLst/>
@@ -2719,7 +2912,7 @@
               <a:buChar char="•"/>
             </a:pPr>
             <a:r>
-              <a:rPr lang="en-US" sz="1200" b="1" dirty="0">
+              <a:rPr lang="en-US" sz="1200" dirty="0">
                 <a:solidFill>
                   <a:srgbClr val="1C2833"/>
                 </a:solidFill>
@@ -2727,7 +2920,7 @@
                 <a:ea typeface="Arial" pitchFamily="34" charset="-122"/>
                 <a:cs typeface="Arial" pitchFamily="34" charset="-120"/>
               </a:rPr>
-              <a:t>Tier up:</a:t>
+              <a:t>Preview Day 6: </a:t>
             </a:r>
             <a:pPr algn="l" indent="0" marL="0">
               <a:lnSpc>
@@ -2739,7 +2932,7 @@
               <a:buNone/>
             </a:pPr>
             <a:r>
-              <a:rPr lang="en-US" sz="1200" dirty="0">
+              <a:rPr lang="en-US" sz="1200" i="1" dirty="0">
                 <a:solidFill>
                   <a:srgbClr val="1C2833"/>
                 </a:solidFill>
@@ -2747,51 +2940,7 @@
                 <a:ea typeface="Arial" pitchFamily="34" charset="-122"/>
                 <a:cs typeface="Arial" pitchFamily="34" charset="-120"/>
               </a:rPr>
-              <a:t> Try 4-digit × 11 problems. Sample: 1234 × 11, 2345 × 11, 4567 × 11. Use the right-to-left carry-cascade method.</a:t>
-            </a:r>
-            <a:endParaRPr lang="en-US" sz="1200" dirty="0"/>
-          </a:p>
-          <a:p>
-            <a:pPr algn="l" marL="342900" indent="-342900">
-              <a:lnSpc>
-                <a:spcPts val="1620"/>
-              </a:lnSpc>
-              <a:spcAft>
-                <a:spcPts val="300"/>
-              </a:spcAft>
-              <a:buSzPct val="100000"/>
-              <a:buChar char="•"/>
-            </a:pPr>
-            <a:r>
-              <a:rPr lang="en-US" sz="1200" b="1" dirty="0">
-                <a:solidFill>
-                  <a:srgbClr val="1C2833"/>
-                </a:solidFill>
-                <a:latin typeface="Arial" pitchFamily="34" charset="0"/>
-                <a:ea typeface="Arial" pitchFamily="34" charset="-122"/>
-                <a:cs typeface="Arial" pitchFamily="34" charset="-120"/>
-              </a:rPr>
-              <a:t>Tier down:</a:t>
-            </a:r>
-            <a:pPr algn="l" indent="0" marL="0">
-              <a:lnSpc>
-                <a:spcPts val="1620"/>
-              </a:lnSpc>
-              <a:spcAft>
-                <a:spcPts val="300"/>
-              </a:spcAft>
-              <a:buNone/>
-            </a:pPr>
-            <a:r>
-              <a:rPr lang="en-US" sz="1200" dirty="0">
-                <a:solidFill>
-                  <a:srgbClr val="1C2833"/>
-                </a:solidFill>
-                <a:latin typeface="Arial" pitchFamily="34" charset="0"/>
-                <a:ea typeface="Arial" pitchFamily="34" charset="-122"/>
-                <a:cs typeface="Arial" pitchFamily="34" charset="-120"/>
-              </a:rPr>
-              <a:t> Focus only on the 2-digit drill today. Build fluency before adding 3-digit.</a:t>
+              <a:t>"Tomorrow — the trick extends to ×12, ×13, … all the way to ×19. The middle-add step scales by a multiplier."</a:t>
             </a:r>
             <a:endParaRPr lang="en-US" sz="1200" dirty="0"/>
           </a:p>
@@ -2949,7 +3098,7 @@
                 <a:ea typeface="Georgia" pitchFamily="34" charset="-122"/>
                 <a:cs typeface="Georgia" pitchFamily="34" charset="-120"/>
               </a:rPr>
-              <a:t>Teacher notes</a:t>
+              <a:t>Student-facing content</a:t>
             </a:r>
             <a:endParaRPr lang="en-US" sz="1800" dirty="0"/>
           </a:p>
@@ -2963,13 +3112,66 @@
         </p:nvSpPr>
         <p:spPr>
           <a:xfrm>
-            <a:off x="406301" y="870942"/>
-            <a:ext cx="8498026" cy="853083"/>
-          </a:xfrm>
-          <a:prstGeom prst="rect">
+            <a:off x="406301" y="883593"/>
+            <a:ext cx="8331398" cy="2226469"/>
+          </a:xfrm>
+          <a:prstGeom prst="rect">
+            <a:avLst/>
+          </a:prstGeom>
+          <a:solidFill>
+            <a:srgbClr val="F4F8F9"/>
+          </a:solidFill>
+          <a:ln/>
+        </p:spPr>
+        <p:txBody>
+          <a:bodyPr wrap="square" rtlCol="0" anchor="ctr"/>
+          <a:lstStyle/>
+          <a:p>
+            <a:pPr indent="0" marL="0">
+              <a:buNone/>
+            </a:pPr>
+            <a:endParaRPr lang="en-US" dirty="0"/>
+          </a:p>
+        </p:txBody>
+      </p:sp>
+      <p:sp>
+        <p:nvSpPr>
+          <p:cNvPr id="5" name="Shape 3"/>
+          <p:cNvSpPr/>
+          <p:nvPr/>
+        </p:nvSpPr>
+        <p:spPr>
+          <a:xfrm>
+            <a:off x="434876" y="883593"/>
+            <a:ext cx="0" cy="2226469"/>
+          </a:xfrm>
+          <a:prstGeom prst="line">
             <a:avLst/>
           </a:prstGeom>
           <a:noFill/>
+          <a:ln w="57150">
+            <a:solidFill>
+              <a:srgbClr val="FE4447"/>
+            </a:solidFill>
+            <a:prstDash val="solid"/>
+          </a:ln>
+        </p:spPr>
+      </p:sp>
+      <p:sp>
+        <p:nvSpPr>
+          <p:cNvPr id="6" name="Text 4"/>
+          <p:cNvSpPr/>
+          <p:nvPr/>
+        </p:nvSpPr>
+        <p:spPr>
+          <a:xfrm>
+            <a:off x="692051" y="1074093"/>
+            <a:ext cx="7973389" cy="230981"/>
+          </a:xfrm>
+          <a:prstGeom prst="rect">
+            <a:avLst/>
+          </a:prstGeom>
+          <a:noFill/>
           <a:ln/>
         </p:spPr>
         <p:txBody>
@@ -2978,7 +3180,7 @@
           <a:p>
             <a:pPr algn="l" indent="0" marL="0">
               <a:lnSpc>
-                <a:spcPts val="1680"/>
+                <a:spcPts val="1820"/>
               </a:lnSpc>
               <a:spcBef>
                 <a:spcPts val="300"/>
@@ -2989,23 +3191,311 @@
               <a:buNone/>
             </a:pPr>
             <a:r>
-              <a:rPr lang="en-US" sz="1200" dirty="0">
+              <a:rPr lang="en-US" sz="1300" b="1" i="1" dirty="0">
                 <a:solidFill>
                   <a:srgbClr val="1C2833"/>
                 </a:solidFill>
-                <a:latin typeface="Arial" pitchFamily="34" charset="0"/>
-                <a:ea typeface="Arial" pitchFamily="34" charset="-122"/>
-                <a:cs typeface="Arial" pitchFamily="34" charset="-120"/>
-              </a:rPr>
-              <a:t>– The Day 1 → Day 5 contrast is the emotional payoff of the module. Make sure every student records it; the personal evidence drives motivation. – Quick-fire (Round 4) should NOT escalate into pure competition. Use it lightly; rotate "first responder" so no single student dominates. – Some students will plateau on the carry case. Pair them with a peer-coach in Round 2 specifically.</a:t>
-            </a:r>
-            <a:endParaRPr lang="en-US" sz="1200" dirty="0"/>
-          </a:p>
-        </p:txBody>
-      </p:sp>
-      <p:sp>
-        <p:nvSpPr>
-          <p:cNvPr id="5" name="Text 3"/>
+                <a:latin typeface="Georgia" pitchFamily="34" charset="0"/>
+                <a:ea typeface="Georgia" pitchFamily="34" charset="-122"/>
+                <a:cs typeface="Georgia" pitchFamily="34" charset="-120"/>
+              </a:rPr>
+              <a:t>Speed Day</a:t>
+            </a:r>
+            <a:endParaRPr lang="en-US" sz="1300" dirty="0"/>
+          </a:p>
+        </p:txBody>
+      </p:sp>
+      <p:sp>
+        <p:nvSpPr>
+          <p:cNvPr id="7" name="Text 5"/>
+          <p:cNvSpPr/>
+          <p:nvPr/>
+        </p:nvSpPr>
+        <p:spPr>
+          <a:xfrm>
+            <a:off x="692051" y="1343174"/>
+            <a:ext cx="7973389" cy="230981"/>
+          </a:xfrm>
+          <a:prstGeom prst="rect">
+            <a:avLst/>
+          </a:prstGeom>
+          <a:noFill/>
+          <a:ln/>
+        </p:spPr>
+        <p:txBody>
+          <a:bodyPr wrap="square" lIns="0" tIns="0" rIns="0" bIns="0" rtlCol="0" anchor="t"/>
+          <a:lstStyle/>
+          <a:p>
+            <a:pPr algn="l" indent="0" marL="0">
+              <a:lnSpc>
+                <a:spcPts val="1820"/>
+              </a:lnSpc>
+              <a:spcBef>
+                <a:spcPts val="300"/>
+              </a:spcBef>
+              <a:spcAft>
+                <a:spcPts val="300"/>
+              </a:spcAft>
+              <a:buNone/>
+            </a:pPr>
+            <a:r>
+              <a:rPr lang="en-US" sz="1300" i="1" dirty="0">
+                <a:solidFill>
+                  <a:srgbClr val="1C2833"/>
+                </a:solidFill>
+                <a:latin typeface="Georgia" pitchFamily="34" charset="0"/>
+                <a:ea typeface="Georgia" pitchFamily="34" charset="-122"/>
+                <a:cs typeface="Georgia" pitchFamily="34" charset="-120"/>
+              </a:rPr>
+              <a:t>Today's question: how much faster has your mental ×11 gotten in 4 days?</a:t>
+            </a:r>
+            <a:endParaRPr lang="en-US" sz="1300" dirty="0"/>
+          </a:p>
+        </p:txBody>
+      </p:sp>
+      <p:sp>
+        <p:nvSpPr>
+          <p:cNvPr id="8" name="Text 6"/>
+          <p:cNvSpPr/>
+          <p:nvPr/>
+        </p:nvSpPr>
+        <p:spPr>
+          <a:xfrm>
+            <a:off x="692051" y="1612255"/>
+            <a:ext cx="7973389" cy="230981"/>
+          </a:xfrm>
+          <a:prstGeom prst="rect">
+            <a:avLst/>
+          </a:prstGeom>
+          <a:noFill/>
+          <a:ln/>
+        </p:spPr>
+        <p:txBody>
+          <a:bodyPr wrap="square" lIns="0" tIns="0" rIns="0" bIns="0" rtlCol="0" anchor="t"/>
+          <a:lstStyle/>
+          <a:p>
+            <a:pPr algn="l" indent="0" marL="0">
+              <a:lnSpc>
+                <a:spcPts val="1820"/>
+              </a:lnSpc>
+              <a:spcBef>
+                <a:spcPts val="300"/>
+              </a:spcBef>
+              <a:spcAft>
+                <a:spcPts val="300"/>
+              </a:spcAft>
+              <a:buNone/>
+            </a:pPr>
+            <a:r>
+              <a:rPr lang="en-US" sz="1300" i="1" dirty="0">
+                <a:solidFill>
+                  <a:srgbClr val="1C2833"/>
+                </a:solidFill>
+                <a:latin typeface="Georgia" pitchFamily="34" charset="0"/>
+                <a:ea typeface="Georgia" pitchFamily="34" charset="-122"/>
+                <a:cs typeface="Georgia" pitchFamily="34" charset="-120"/>
+              </a:rPr>
+              <a:t>Record your Day 5 retest time. Compare with Day 1. The gap is the proof of practice.</a:t>
+            </a:r>
+            <a:endParaRPr lang="en-US" sz="1300" dirty="0"/>
+          </a:p>
+        </p:txBody>
+      </p:sp>
+      <p:sp>
+        <p:nvSpPr>
+          <p:cNvPr id="9" name="Text 7"/>
+          <p:cNvSpPr/>
+          <p:nvPr/>
+        </p:nvSpPr>
+        <p:spPr>
+          <a:xfrm>
+            <a:off x="692051" y="1881336"/>
+            <a:ext cx="7973389" cy="230981"/>
+          </a:xfrm>
+          <a:prstGeom prst="rect">
+            <a:avLst/>
+          </a:prstGeom>
+          <a:noFill/>
+          <a:ln/>
+        </p:spPr>
+        <p:txBody>
+          <a:bodyPr wrap="square" lIns="0" tIns="0" rIns="0" bIns="0" rtlCol="0" anchor="t"/>
+          <a:lstStyle/>
+          <a:p>
+            <a:pPr algn="l" indent="0" marL="0">
+              <a:lnSpc>
+                <a:spcPts val="1820"/>
+              </a:lnSpc>
+              <a:spcBef>
+                <a:spcPts val="300"/>
+              </a:spcBef>
+              <a:spcAft>
+                <a:spcPts val="300"/>
+              </a:spcAft>
+              <a:buNone/>
+            </a:pPr>
+            <a:r>
+              <a:rPr lang="en-US" sz="1300" i="1" dirty="0">
+                <a:solidFill>
+                  <a:srgbClr val="1C2833"/>
+                </a:solidFill>
+                <a:latin typeface="Georgia" pitchFamily="34" charset="0"/>
+                <a:ea typeface="Georgia" pitchFamily="34" charset="-122"/>
+                <a:cs typeface="Georgia" pitchFamily="34" charset="-120"/>
+              </a:rPr>
+              <a:t>By end of class you should hit roughly:</a:t>
+            </a:r>
+            <a:endParaRPr lang="en-US" sz="1300" dirty="0"/>
+          </a:p>
+        </p:txBody>
+      </p:sp>
+      <p:sp>
+        <p:nvSpPr>
+          <p:cNvPr id="10" name="Text 8"/>
+          <p:cNvSpPr/>
+          <p:nvPr/>
+        </p:nvSpPr>
+        <p:spPr>
+          <a:xfrm>
+            <a:off x="692051" y="2150418"/>
+            <a:ext cx="7973389" cy="230981"/>
+          </a:xfrm>
+          <a:prstGeom prst="rect">
+            <a:avLst/>
+          </a:prstGeom>
+          <a:noFill/>
+          <a:ln/>
+        </p:spPr>
+        <p:txBody>
+          <a:bodyPr wrap="square" lIns="0" tIns="0" rIns="0" bIns="0" rtlCol="0" anchor="t"/>
+          <a:lstStyle/>
+          <a:p>
+            <a:pPr algn="l" indent="0" marL="0">
+              <a:lnSpc>
+                <a:spcPts val="1820"/>
+              </a:lnSpc>
+              <a:spcBef>
+                <a:spcPts val="300"/>
+              </a:spcBef>
+              <a:spcAft>
+                <a:spcPts val="300"/>
+              </a:spcAft>
+              <a:buNone/>
+            </a:pPr>
+            <a:r>
+              <a:rPr lang="en-US" sz="1300" i="1" dirty="0">
+                <a:solidFill>
+                  <a:srgbClr val="1C2833"/>
+                </a:solidFill>
+                <a:latin typeface="Georgia" pitchFamily="34" charset="0"/>
+                <a:ea typeface="Georgia" pitchFamily="34" charset="-122"/>
+                <a:cs typeface="Georgia" pitchFamily="34" charset="-120"/>
+              </a:rPr>
+              <a:t>2-digit × 11 (no-carry): under 2 seconds</a:t>
+            </a:r>
+            <a:endParaRPr lang="en-US" sz="1300" dirty="0"/>
+          </a:p>
+        </p:txBody>
+      </p:sp>
+      <p:sp>
+        <p:nvSpPr>
+          <p:cNvPr id="11" name="Text 9"/>
+          <p:cNvSpPr/>
+          <p:nvPr/>
+        </p:nvSpPr>
+        <p:spPr>
+          <a:xfrm>
+            <a:off x="692051" y="2419499"/>
+            <a:ext cx="7973389" cy="230981"/>
+          </a:xfrm>
+          <a:prstGeom prst="rect">
+            <a:avLst/>
+          </a:prstGeom>
+          <a:noFill/>
+          <a:ln/>
+        </p:spPr>
+        <p:txBody>
+          <a:bodyPr wrap="square" lIns="0" tIns="0" rIns="0" bIns="0" rtlCol="0" anchor="t"/>
+          <a:lstStyle/>
+          <a:p>
+            <a:pPr algn="l" indent="0" marL="0">
+              <a:lnSpc>
+                <a:spcPts val="1820"/>
+              </a:lnSpc>
+              <a:spcBef>
+                <a:spcPts val="300"/>
+              </a:spcBef>
+              <a:spcAft>
+                <a:spcPts val="300"/>
+              </a:spcAft>
+              <a:buNone/>
+            </a:pPr>
+            <a:r>
+              <a:rPr lang="en-US" sz="1300" i="1" dirty="0">
+                <a:solidFill>
+                  <a:srgbClr val="1C2833"/>
+                </a:solidFill>
+                <a:latin typeface="Georgia" pitchFamily="34" charset="0"/>
+                <a:ea typeface="Georgia" pitchFamily="34" charset="-122"/>
+                <a:cs typeface="Georgia" pitchFamily="34" charset="-120"/>
+              </a:rPr>
+              <a:t>2-digit × 11 (carry): under 4 seconds</a:t>
+            </a:r>
+            <a:endParaRPr lang="en-US" sz="1300" dirty="0"/>
+          </a:p>
+        </p:txBody>
+      </p:sp>
+      <p:sp>
+        <p:nvSpPr>
+          <p:cNvPr id="12" name="Text 10"/>
+          <p:cNvSpPr/>
+          <p:nvPr/>
+        </p:nvSpPr>
+        <p:spPr>
+          <a:xfrm>
+            <a:off x="692051" y="2688580"/>
+            <a:ext cx="7973389" cy="230981"/>
+          </a:xfrm>
+          <a:prstGeom prst="rect">
+            <a:avLst/>
+          </a:prstGeom>
+          <a:noFill/>
+          <a:ln/>
+        </p:spPr>
+        <p:txBody>
+          <a:bodyPr wrap="square" lIns="0" tIns="0" rIns="0" bIns="0" rtlCol="0" anchor="t"/>
+          <a:lstStyle/>
+          <a:p>
+            <a:pPr algn="l" indent="0" marL="0">
+              <a:lnSpc>
+                <a:spcPts val="1820"/>
+              </a:lnSpc>
+              <a:spcBef>
+                <a:spcPts val="300"/>
+              </a:spcBef>
+              <a:spcAft>
+                <a:spcPts val="300"/>
+              </a:spcAft>
+              <a:buNone/>
+            </a:pPr>
+            <a:r>
+              <a:rPr lang="en-US" sz="1300" i="1" dirty="0">
+                <a:solidFill>
+                  <a:srgbClr val="1C2833"/>
+                </a:solidFill>
+                <a:latin typeface="Georgia" pitchFamily="34" charset="0"/>
+                <a:ea typeface="Georgia" pitchFamily="34" charset="-122"/>
+                <a:cs typeface="Georgia" pitchFamily="34" charset="-120"/>
+              </a:rPr>
+              <a:t>3-digit × 11: under 8 seconds</a:t>
+            </a:r>
+            <a:endParaRPr lang="en-US" sz="1300" dirty="0"/>
+          </a:p>
+        </p:txBody>
+      </p:sp>
+      <p:sp>
+        <p:nvSpPr>
+          <p:cNvPr id="13" name="Text 11"/>
           <p:cNvSpPr/>
           <p:nvPr/>
         </p:nvSpPr>
@@ -3155,6 +3645,730 @@
                 <a:ea typeface="Georgia" pitchFamily="34" charset="-122"/>
                 <a:cs typeface="Georgia" pitchFamily="34" charset="-120"/>
               </a:rPr>
+              <a:t>Homework</a:t>
+            </a:r>
+            <a:endParaRPr lang="en-US" sz="1800" dirty="0"/>
+          </a:p>
+        </p:txBody>
+      </p:sp>
+      <p:sp>
+        <p:nvSpPr>
+          <p:cNvPr id="4" name="Text 2"/>
+          <p:cNvSpPr/>
+          <p:nvPr/>
+        </p:nvSpPr>
+        <p:spPr>
+          <a:xfrm>
+            <a:off x="634901" y="883593"/>
+            <a:ext cx="8102798" cy="281880"/>
+          </a:xfrm>
+          <a:prstGeom prst="rect">
+            <a:avLst/>
+          </a:prstGeom>
+          <a:noFill/>
+          <a:ln/>
+        </p:spPr>
+        <p:txBody>
+          <a:bodyPr wrap="square" lIns="0" tIns="0" rIns="0" bIns="0" rtlCol="0" anchor="t"/>
+          <a:lstStyle/>
+          <a:p>
+            <a:pPr algn="l" marL="342900" indent="-342900">
+              <a:lnSpc>
+                <a:spcPts val="1620"/>
+              </a:lnSpc>
+              <a:spcAft>
+                <a:spcPts val="300"/>
+              </a:spcAft>
+              <a:buSzPct val="100000"/>
+              <a:buChar char="•"/>
+            </a:pPr>
+            <a:r>
+              <a:rPr lang="en-US" sz="1200" dirty="0">
+                <a:solidFill>
+                  <a:srgbClr val="1C2833"/>
+                </a:solidFill>
+                <a:latin typeface="Arial" pitchFamily="34" charset="0"/>
+                <a:ea typeface="Arial" pitchFamily="34" charset="-122"/>
+                <a:cs typeface="Arial" pitchFamily="34" charset="-120"/>
+              </a:rPr>
+              <a:t>25-problem mixed drill sheet. Solo, untimed. Target: 100% correct.</a:t>
+            </a:r>
+            <a:endParaRPr lang="en-US" sz="1200" dirty="0"/>
+          </a:p>
+        </p:txBody>
+      </p:sp>
+      <p:sp>
+        <p:nvSpPr>
+          <p:cNvPr id="5" name="Text 3"/>
+          <p:cNvSpPr/>
+          <p:nvPr/>
+        </p:nvSpPr>
+        <p:spPr>
+          <a:xfrm>
+            <a:off x="406301" y="4434929"/>
+            <a:ext cx="8498026" cy="213271"/>
+          </a:xfrm>
+          <a:prstGeom prst="rect">
+            <a:avLst/>
+          </a:prstGeom>
+          <a:noFill/>
+          <a:ln/>
+        </p:spPr>
+        <p:txBody>
+          <a:bodyPr wrap="square" lIns="0" tIns="0" rIns="0" bIns="0" rtlCol="0" anchor="t"/>
+          <a:lstStyle/>
+          <a:p>
+            <a:pPr algn="l" indent="0" marL="0">
+              <a:lnSpc>
+                <a:spcPts val="1680"/>
+              </a:lnSpc>
+              <a:spcBef>
+                <a:spcPts val="300"/>
+              </a:spcBef>
+              <a:spcAft>
+                <a:spcPts val="300"/>
+              </a:spcAft>
+              <a:buNone/>
+            </a:pPr>
+            <a:r>
+              <a:rPr lang="en-US" sz="1200" dirty="0">
+                <a:solidFill>
+                  <a:srgbClr val="1C2833"/>
+                </a:solidFill>
+                <a:latin typeface="Arial" pitchFamily="34" charset="0"/>
+                <a:ea typeface="Arial" pitchFamily="34" charset="-122"/>
+                <a:cs typeface="Arial" pitchFamily="34" charset="-120"/>
+              </a:rPr>
+              <a:t>Middle ·  · IKS Curriculum</a:t>
+            </a:r>
+            <a:endParaRPr lang="en-US" sz="1200" dirty="0"/>
+          </a:p>
+        </p:txBody>
+      </p:sp>
+    </p:spTree>
+  </p:cSld>
+  <p:clrMapOvr>
+    <a:masterClrMapping/>
+  </p:clrMapOvr>
+</p:sld>
+</file>
+
+<file path=ppt/slides/slide14.xml><?xml version="1.0" encoding="utf-8"?>
+<p:sld xmlns:a="http://schemas.openxmlformats.org/drawingml/2006/main" xmlns:r="http://schemas.openxmlformats.org/officeDocument/2006/relationships" xmlns:p="http://schemas.openxmlformats.org/presentationml/2006/main">
+  <p:cSld name="Slide 14">
+    <p:bg>
+      <p:bgPr>
+        <a:solidFill>
+          <a:srgbClr val="FFFFFF"/>
+        </a:solidFill>
+      </p:bgPr>
+    </p:bg>
+    <p:spTree>
+      <p:nvGrpSpPr>
+        <p:cNvPr id="1" name=""/>
+        <p:cNvGrpSpPr/>
+        <p:nvPr/>
+      </p:nvGrpSpPr>
+      <p:grpSpPr>
+        <a:xfrm>
+          <a:off x="0" y="0"/>
+          <a:ext cx="0" cy="0"/>
+          <a:chOff x="0" y="0"/>
+          <a:chExt cx="0" cy="0"/>
+        </a:xfrm>
+      </p:grpSpPr>
+      <p:sp>
+        <p:nvSpPr>
+          <p:cNvPr id="2" name="Text 0"/>
+          <p:cNvSpPr/>
+          <p:nvPr/>
+        </p:nvSpPr>
+        <p:spPr>
+          <a:xfrm>
+            <a:off x="0" y="0"/>
+            <a:ext cx="9144000" cy="101501"/>
+          </a:xfrm>
+          <a:prstGeom prst="rect">
+            <a:avLst/>
+          </a:prstGeom>
+          <a:solidFill>
+            <a:srgbClr val="277884"/>
+          </a:solidFill>
+          <a:ln/>
+        </p:spPr>
+        <p:txBody>
+          <a:bodyPr wrap="square" rtlCol="0" anchor="ctr"/>
+          <a:lstStyle/>
+          <a:p>
+            <a:pPr indent="0" marL="0">
+              <a:buNone/>
+            </a:pPr>
+            <a:endParaRPr lang="en-US" dirty="0"/>
+          </a:p>
+        </p:txBody>
+      </p:sp>
+      <p:sp>
+        <p:nvSpPr>
+          <p:cNvPr id="3" name="Text 1"/>
+          <p:cNvSpPr/>
+          <p:nvPr/>
+        </p:nvSpPr>
+        <p:spPr>
+          <a:xfrm>
+            <a:off x="406301" y="457051"/>
+            <a:ext cx="8498026" cy="274290"/>
+          </a:xfrm>
+          <a:prstGeom prst="rect">
+            <a:avLst/>
+          </a:prstGeom>
+          <a:noFill/>
+          <a:ln/>
+        </p:spPr>
+        <p:txBody>
+          <a:bodyPr wrap="square" lIns="0" tIns="0" rIns="0" bIns="0" rtlCol="0" anchor="t"/>
+          <a:lstStyle/>
+          <a:p>
+            <a:pPr algn="l" indent="0" marL="0">
+              <a:lnSpc>
+                <a:spcPts val="2160"/>
+              </a:lnSpc>
+              <a:spcBef>
+                <a:spcPts val="600"/>
+              </a:spcBef>
+              <a:spcAft>
+                <a:spcPts val="800"/>
+              </a:spcAft>
+              <a:buNone/>
+            </a:pPr>
+            <a:r>
+              <a:rPr lang="en-US" sz="1800" b="1" dirty="0">
+                <a:solidFill>
+                  <a:srgbClr val="FE4447"/>
+                </a:solidFill>
+                <a:latin typeface="Georgia" pitchFamily="34" charset="0"/>
+                <a:ea typeface="Georgia" pitchFamily="34" charset="-122"/>
+                <a:cs typeface="Georgia" pitchFamily="34" charset="-120"/>
+              </a:rPr>
+              <a:t>Differentiation</a:t>
+            </a:r>
+            <a:endParaRPr lang="en-US" sz="1800" dirty="0"/>
+          </a:p>
+        </p:txBody>
+      </p:sp>
+      <p:sp>
+        <p:nvSpPr>
+          <p:cNvPr id="4" name="Text 2"/>
+          <p:cNvSpPr/>
+          <p:nvPr/>
+        </p:nvSpPr>
+        <p:spPr>
+          <a:xfrm>
+            <a:off x="634901" y="883593"/>
+            <a:ext cx="8102798" cy="731341"/>
+          </a:xfrm>
+          <a:prstGeom prst="rect">
+            <a:avLst/>
+          </a:prstGeom>
+          <a:noFill/>
+          <a:ln/>
+        </p:spPr>
+        <p:txBody>
+          <a:bodyPr wrap="square" lIns="0" tIns="0" rIns="0" bIns="0" rtlCol="0" anchor="t"/>
+          <a:lstStyle/>
+          <a:p>
+            <a:pPr algn="l" marL="342900" indent="-342900">
+              <a:lnSpc>
+                <a:spcPts val="1620"/>
+              </a:lnSpc>
+              <a:spcAft>
+                <a:spcPts val="300"/>
+              </a:spcAft>
+              <a:buSzPct val="100000"/>
+              <a:buChar char="•"/>
+            </a:pPr>
+            <a:r>
+              <a:rPr lang="en-US" sz="1200" b="1" dirty="0">
+                <a:solidFill>
+                  <a:srgbClr val="1C2833"/>
+                </a:solidFill>
+                <a:latin typeface="Arial" pitchFamily="34" charset="0"/>
+                <a:ea typeface="Arial" pitchFamily="34" charset="-122"/>
+                <a:cs typeface="Arial" pitchFamily="34" charset="-120"/>
+              </a:rPr>
+              <a:t>Tier up:</a:t>
+            </a:r>
+            <a:pPr algn="l" indent="0" marL="0">
+              <a:lnSpc>
+                <a:spcPts val="1620"/>
+              </a:lnSpc>
+              <a:spcAft>
+                <a:spcPts val="300"/>
+              </a:spcAft>
+              <a:buNone/>
+            </a:pPr>
+            <a:r>
+              <a:rPr lang="en-US" sz="1200" dirty="0">
+                <a:solidFill>
+                  <a:srgbClr val="1C2833"/>
+                </a:solidFill>
+                <a:latin typeface="Arial" pitchFamily="34" charset="0"/>
+                <a:ea typeface="Arial" pitchFamily="34" charset="-122"/>
+                <a:cs typeface="Arial" pitchFamily="34" charset="-120"/>
+              </a:rPr>
+              <a:t> Try 4-digit × 11 problems. Sample: 1234 × 11, 2345 × 11, 4567 × 11. Use the right-to-left carry-cascade method.</a:t>
+            </a:r>
+            <a:endParaRPr lang="en-US" sz="1200" dirty="0"/>
+          </a:p>
+          <a:p>
+            <a:pPr algn="l" marL="342900" indent="-342900">
+              <a:lnSpc>
+                <a:spcPts val="1620"/>
+              </a:lnSpc>
+              <a:spcAft>
+                <a:spcPts val="300"/>
+              </a:spcAft>
+              <a:buSzPct val="100000"/>
+              <a:buChar char="•"/>
+            </a:pPr>
+            <a:r>
+              <a:rPr lang="en-US" sz="1200" b="1" dirty="0">
+                <a:solidFill>
+                  <a:srgbClr val="1C2833"/>
+                </a:solidFill>
+                <a:latin typeface="Arial" pitchFamily="34" charset="0"/>
+                <a:ea typeface="Arial" pitchFamily="34" charset="-122"/>
+                <a:cs typeface="Arial" pitchFamily="34" charset="-120"/>
+              </a:rPr>
+              <a:t>Tier down:</a:t>
+            </a:r>
+            <a:pPr algn="l" indent="0" marL="0">
+              <a:lnSpc>
+                <a:spcPts val="1620"/>
+              </a:lnSpc>
+              <a:spcAft>
+                <a:spcPts val="300"/>
+              </a:spcAft>
+              <a:buNone/>
+            </a:pPr>
+            <a:r>
+              <a:rPr lang="en-US" sz="1200" dirty="0">
+                <a:solidFill>
+                  <a:srgbClr val="1C2833"/>
+                </a:solidFill>
+                <a:latin typeface="Arial" pitchFamily="34" charset="0"/>
+                <a:ea typeface="Arial" pitchFamily="34" charset="-122"/>
+                <a:cs typeface="Arial" pitchFamily="34" charset="-120"/>
+              </a:rPr>
+              <a:t> Focus only on the 2-digit drill today. Build fluency before adding 3-digit.</a:t>
+            </a:r>
+            <a:endParaRPr lang="en-US" sz="1200" dirty="0"/>
+          </a:p>
+        </p:txBody>
+      </p:sp>
+      <p:sp>
+        <p:nvSpPr>
+          <p:cNvPr id="5" name="Text 3"/>
+          <p:cNvSpPr/>
+          <p:nvPr/>
+        </p:nvSpPr>
+        <p:spPr>
+          <a:xfrm>
+            <a:off x="406301" y="4434929"/>
+            <a:ext cx="8498026" cy="213271"/>
+          </a:xfrm>
+          <a:prstGeom prst="rect">
+            <a:avLst/>
+          </a:prstGeom>
+          <a:noFill/>
+          <a:ln/>
+        </p:spPr>
+        <p:txBody>
+          <a:bodyPr wrap="square" lIns="0" tIns="0" rIns="0" bIns="0" rtlCol="0" anchor="t"/>
+          <a:lstStyle/>
+          <a:p>
+            <a:pPr algn="l" indent="0" marL="0">
+              <a:lnSpc>
+                <a:spcPts val="1680"/>
+              </a:lnSpc>
+              <a:spcBef>
+                <a:spcPts val="300"/>
+              </a:spcBef>
+              <a:spcAft>
+                <a:spcPts val="300"/>
+              </a:spcAft>
+              <a:buNone/>
+            </a:pPr>
+            <a:r>
+              <a:rPr lang="en-US" sz="1200" dirty="0">
+                <a:solidFill>
+                  <a:srgbClr val="1C2833"/>
+                </a:solidFill>
+                <a:latin typeface="Arial" pitchFamily="34" charset="0"/>
+                <a:ea typeface="Arial" pitchFamily="34" charset="-122"/>
+                <a:cs typeface="Arial" pitchFamily="34" charset="-120"/>
+              </a:rPr>
+              <a:t>Middle ·  · IKS Curriculum</a:t>
+            </a:r>
+            <a:endParaRPr lang="en-US" sz="1200" dirty="0"/>
+          </a:p>
+        </p:txBody>
+      </p:sp>
+    </p:spTree>
+  </p:cSld>
+  <p:clrMapOvr>
+    <a:masterClrMapping/>
+  </p:clrMapOvr>
+</p:sld>
+</file>
+
+<file path=ppt/slides/slide15.xml><?xml version="1.0" encoding="utf-8"?>
+<p:sld xmlns:a="http://schemas.openxmlformats.org/drawingml/2006/main" xmlns:r="http://schemas.openxmlformats.org/officeDocument/2006/relationships" xmlns:p="http://schemas.openxmlformats.org/presentationml/2006/main">
+  <p:cSld name="Slide 15">
+    <p:bg>
+      <p:bgPr>
+        <a:solidFill>
+          <a:srgbClr val="FFFFFF"/>
+        </a:solidFill>
+      </p:bgPr>
+    </p:bg>
+    <p:spTree>
+      <p:nvGrpSpPr>
+        <p:cNvPr id="1" name=""/>
+        <p:cNvGrpSpPr/>
+        <p:nvPr/>
+      </p:nvGrpSpPr>
+      <p:grpSpPr>
+        <a:xfrm>
+          <a:off x="0" y="0"/>
+          <a:ext cx="0" cy="0"/>
+          <a:chOff x="0" y="0"/>
+          <a:chExt cx="0" cy="0"/>
+        </a:xfrm>
+      </p:grpSpPr>
+      <p:sp>
+        <p:nvSpPr>
+          <p:cNvPr id="2" name="Text 0"/>
+          <p:cNvSpPr/>
+          <p:nvPr/>
+        </p:nvSpPr>
+        <p:spPr>
+          <a:xfrm>
+            <a:off x="0" y="0"/>
+            <a:ext cx="9144000" cy="101501"/>
+          </a:xfrm>
+          <a:prstGeom prst="rect">
+            <a:avLst/>
+          </a:prstGeom>
+          <a:solidFill>
+            <a:srgbClr val="277884"/>
+          </a:solidFill>
+          <a:ln/>
+        </p:spPr>
+        <p:txBody>
+          <a:bodyPr wrap="square" rtlCol="0" anchor="ctr"/>
+          <a:lstStyle/>
+          <a:p>
+            <a:pPr indent="0" marL="0">
+              <a:buNone/>
+            </a:pPr>
+            <a:endParaRPr lang="en-US" dirty="0"/>
+          </a:p>
+        </p:txBody>
+      </p:sp>
+      <p:sp>
+        <p:nvSpPr>
+          <p:cNvPr id="3" name="Text 1"/>
+          <p:cNvSpPr/>
+          <p:nvPr/>
+        </p:nvSpPr>
+        <p:spPr>
+          <a:xfrm>
+            <a:off x="406301" y="457051"/>
+            <a:ext cx="8498026" cy="274290"/>
+          </a:xfrm>
+          <a:prstGeom prst="rect">
+            <a:avLst/>
+          </a:prstGeom>
+          <a:noFill/>
+          <a:ln/>
+        </p:spPr>
+        <p:txBody>
+          <a:bodyPr wrap="square" lIns="0" tIns="0" rIns="0" bIns="0" rtlCol="0" anchor="t"/>
+          <a:lstStyle/>
+          <a:p>
+            <a:pPr algn="l" indent="0" marL="0">
+              <a:lnSpc>
+                <a:spcPts val="2160"/>
+              </a:lnSpc>
+              <a:spcBef>
+                <a:spcPts val="600"/>
+              </a:spcBef>
+              <a:spcAft>
+                <a:spcPts val="800"/>
+              </a:spcAft>
+              <a:buNone/>
+            </a:pPr>
+            <a:r>
+              <a:rPr lang="en-US" sz="1800" b="1" dirty="0">
+                <a:solidFill>
+                  <a:srgbClr val="FE4447"/>
+                </a:solidFill>
+                <a:latin typeface="Georgia" pitchFamily="34" charset="0"/>
+                <a:ea typeface="Georgia" pitchFamily="34" charset="-122"/>
+                <a:cs typeface="Georgia" pitchFamily="34" charset="-120"/>
+              </a:rPr>
+              <a:t>Teacher notes</a:t>
+            </a:r>
+            <a:endParaRPr lang="en-US" sz="1800" dirty="0"/>
+          </a:p>
+        </p:txBody>
+      </p:sp>
+      <p:sp>
+        <p:nvSpPr>
+          <p:cNvPr id="4" name="Text 2"/>
+          <p:cNvSpPr/>
+          <p:nvPr/>
+        </p:nvSpPr>
+        <p:spPr>
+          <a:xfrm>
+            <a:off x="634901" y="883593"/>
+            <a:ext cx="8102798" cy="1180802"/>
+          </a:xfrm>
+          <a:prstGeom prst="rect">
+            <a:avLst/>
+          </a:prstGeom>
+          <a:noFill/>
+          <a:ln/>
+        </p:spPr>
+        <p:txBody>
+          <a:bodyPr wrap="square" lIns="0" tIns="0" rIns="0" bIns="0" rtlCol="0" anchor="t"/>
+          <a:lstStyle/>
+          <a:p>
+            <a:pPr algn="l" marL="342900" indent="-342900">
+              <a:lnSpc>
+                <a:spcPts val="1620"/>
+              </a:lnSpc>
+              <a:spcAft>
+                <a:spcPts val="300"/>
+              </a:spcAft>
+              <a:buSzPct val="100000"/>
+              <a:buChar char="•"/>
+            </a:pPr>
+            <a:r>
+              <a:rPr lang="en-US" sz="1200" dirty="0">
+                <a:solidFill>
+                  <a:srgbClr val="1C2833"/>
+                </a:solidFill>
+                <a:latin typeface="Arial" pitchFamily="34" charset="0"/>
+                <a:ea typeface="Arial" pitchFamily="34" charset="-122"/>
+                <a:cs typeface="Arial" pitchFamily="34" charset="-120"/>
+              </a:rPr>
+              <a:t>The Day 1 → Day 5 contrast is the emotional payoff of the module. Make sure every student records it; the personal evidence drives motivation.</a:t>
+            </a:r>
+            <a:endParaRPr lang="en-US" sz="1200" dirty="0"/>
+          </a:p>
+          <a:p>
+            <a:pPr algn="l" marL="342900" indent="-342900">
+              <a:lnSpc>
+                <a:spcPts val="1620"/>
+              </a:lnSpc>
+              <a:spcAft>
+                <a:spcPts val="300"/>
+              </a:spcAft>
+              <a:buSzPct val="100000"/>
+              <a:buChar char="•"/>
+            </a:pPr>
+            <a:r>
+              <a:rPr lang="en-US" sz="1200" dirty="0">
+                <a:solidFill>
+                  <a:srgbClr val="1C2833"/>
+                </a:solidFill>
+                <a:latin typeface="Arial" pitchFamily="34" charset="0"/>
+                <a:ea typeface="Arial" pitchFamily="34" charset="-122"/>
+                <a:cs typeface="Arial" pitchFamily="34" charset="-120"/>
+              </a:rPr>
+              <a:t>Quick-fire (Round 4) should NOT escalate into pure competition. Use it lightly; rotate "first responder" so no single student dominates.</a:t>
+            </a:r>
+            <a:endParaRPr lang="en-US" sz="1200" dirty="0"/>
+          </a:p>
+          <a:p>
+            <a:pPr algn="l" marL="342900" indent="-342900">
+              <a:lnSpc>
+                <a:spcPts val="1620"/>
+              </a:lnSpc>
+              <a:spcAft>
+                <a:spcPts val="300"/>
+              </a:spcAft>
+              <a:buSzPct val="100000"/>
+              <a:buChar char="•"/>
+            </a:pPr>
+            <a:r>
+              <a:rPr lang="en-US" sz="1200" dirty="0">
+                <a:solidFill>
+                  <a:srgbClr val="1C2833"/>
+                </a:solidFill>
+                <a:latin typeface="Arial" pitchFamily="34" charset="0"/>
+                <a:ea typeface="Arial" pitchFamily="34" charset="-122"/>
+                <a:cs typeface="Arial" pitchFamily="34" charset="-120"/>
+              </a:rPr>
+              <a:t>Some students will plateau on the carry case. Pair them with a peer-coach in Round 2 specifically.</a:t>
+            </a:r>
+            <a:endParaRPr lang="en-US" sz="1200" dirty="0"/>
+          </a:p>
+        </p:txBody>
+      </p:sp>
+      <p:sp>
+        <p:nvSpPr>
+          <p:cNvPr id="5" name="Text 3"/>
+          <p:cNvSpPr/>
+          <p:nvPr/>
+        </p:nvSpPr>
+        <p:spPr>
+          <a:xfrm>
+            <a:off x="406301" y="4434929"/>
+            <a:ext cx="8498026" cy="213271"/>
+          </a:xfrm>
+          <a:prstGeom prst="rect">
+            <a:avLst/>
+          </a:prstGeom>
+          <a:noFill/>
+          <a:ln/>
+        </p:spPr>
+        <p:txBody>
+          <a:bodyPr wrap="square" lIns="0" tIns="0" rIns="0" bIns="0" rtlCol="0" anchor="t"/>
+          <a:lstStyle/>
+          <a:p>
+            <a:pPr algn="l" indent="0" marL="0">
+              <a:lnSpc>
+                <a:spcPts val="1680"/>
+              </a:lnSpc>
+              <a:spcBef>
+                <a:spcPts val="300"/>
+              </a:spcBef>
+              <a:spcAft>
+                <a:spcPts val="300"/>
+              </a:spcAft>
+              <a:buNone/>
+            </a:pPr>
+            <a:r>
+              <a:rPr lang="en-US" sz="1200" dirty="0">
+                <a:solidFill>
+                  <a:srgbClr val="1C2833"/>
+                </a:solidFill>
+                <a:latin typeface="Arial" pitchFamily="34" charset="0"/>
+                <a:ea typeface="Arial" pitchFamily="34" charset="-122"/>
+                <a:cs typeface="Arial" pitchFamily="34" charset="-120"/>
+              </a:rPr>
+              <a:t>Middle ·  · IKS Curriculum</a:t>
+            </a:r>
+            <a:endParaRPr lang="en-US" sz="1200" dirty="0"/>
+          </a:p>
+        </p:txBody>
+      </p:sp>
+    </p:spTree>
+  </p:cSld>
+  <p:clrMapOvr>
+    <a:masterClrMapping/>
+  </p:clrMapOvr>
+</p:sld>
+</file>
+
+<file path=ppt/slides/slide16.xml><?xml version="1.0" encoding="utf-8"?>
+<p:sld xmlns:a="http://schemas.openxmlformats.org/drawingml/2006/main" xmlns:r="http://schemas.openxmlformats.org/officeDocument/2006/relationships" xmlns:p="http://schemas.openxmlformats.org/presentationml/2006/main">
+  <p:cSld name="Slide 16">
+    <p:bg>
+      <p:bgPr>
+        <a:solidFill>
+          <a:srgbClr val="FFFFFF"/>
+        </a:solidFill>
+      </p:bgPr>
+    </p:bg>
+    <p:spTree>
+      <p:nvGrpSpPr>
+        <p:cNvPr id="1" name=""/>
+        <p:cNvGrpSpPr/>
+        <p:nvPr/>
+      </p:nvGrpSpPr>
+      <p:grpSpPr>
+        <a:xfrm>
+          <a:off x="0" y="0"/>
+          <a:ext cx="0" cy="0"/>
+          <a:chOff x="0" y="0"/>
+          <a:chExt cx="0" cy="0"/>
+        </a:xfrm>
+      </p:grpSpPr>
+      <p:sp>
+        <p:nvSpPr>
+          <p:cNvPr id="2" name="Text 0"/>
+          <p:cNvSpPr/>
+          <p:nvPr/>
+        </p:nvSpPr>
+        <p:spPr>
+          <a:xfrm>
+            <a:off x="0" y="0"/>
+            <a:ext cx="9144000" cy="101501"/>
+          </a:xfrm>
+          <a:prstGeom prst="rect">
+            <a:avLst/>
+          </a:prstGeom>
+          <a:solidFill>
+            <a:srgbClr val="277884"/>
+          </a:solidFill>
+          <a:ln/>
+        </p:spPr>
+        <p:txBody>
+          <a:bodyPr wrap="square" rtlCol="0" anchor="ctr"/>
+          <a:lstStyle/>
+          <a:p>
+            <a:pPr indent="0" marL="0">
+              <a:buNone/>
+            </a:pPr>
+            <a:endParaRPr lang="en-US" dirty="0"/>
+          </a:p>
+        </p:txBody>
+      </p:sp>
+      <p:sp>
+        <p:nvSpPr>
+          <p:cNvPr id="3" name="Text 1"/>
+          <p:cNvSpPr/>
+          <p:nvPr/>
+        </p:nvSpPr>
+        <p:spPr>
+          <a:xfrm>
+            <a:off x="406301" y="457051"/>
+            <a:ext cx="8498026" cy="274290"/>
+          </a:xfrm>
+          <a:prstGeom prst="rect">
+            <a:avLst/>
+          </a:prstGeom>
+          <a:noFill/>
+          <a:ln/>
+        </p:spPr>
+        <p:txBody>
+          <a:bodyPr wrap="square" lIns="0" tIns="0" rIns="0" bIns="0" rtlCol="0" anchor="t"/>
+          <a:lstStyle/>
+          <a:p>
+            <a:pPr algn="l" indent="0" marL="0">
+              <a:lnSpc>
+                <a:spcPts val="2160"/>
+              </a:lnSpc>
+              <a:spcBef>
+                <a:spcPts val="600"/>
+              </a:spcBef>
+              <a:spcAft>
+                <a:spcPts val="800"/>
+              </a:spcAft>
+              <a:buNone/>
+            </a:pPr>
+            <a:r>
+              <a:rPr lang="en-US" sz="1800" b="1" dirty="0">
+                <a:solidFill>
+                  <a:srgbClr val="FE4447"/>
+                </a:solidFill>
+                <a:latin typeface="Georgia" pitchFamily="34" charset="0"/>
+                <a:ea typeface="Georgia" pitchFamily="34" charset="-122"/>
+                <a:cs typeface="Georgia" pitchFamily="34" charset="-120"/>
+              </a:rPr>
               <a:t>Citation(s) used in this lesson</a:t>
             </a:r>
             <a:endParaRPr lang="en-US" sz="1800" dirty="0"/>
@@ -3359,7 +4573,7 @@
                 <a:ea typeface="Georgia" pitchFamily="34" charset="-122"/>
                 <a:cs typeface="Georgia" pitchFamily="34" charset="-120"/>
               </a:rPr>
-              <a:t>Materials</a:t>
+              <a:t>Learning objective</a:t>
             </a:r>
             <a:endParaRPr lang="en-US" sz="1800" dirty="0"/>
           </a:p>
@@ -3374,7 +4588,7 @@
         <p:spPr>
           <a:xfrm>
             <a:off x="406301" y="870942"/>
-            <a:ext cx="8498026" cy="213271"/>
+            <a:ext cx="8498026" cy="426541"/>
           </a:xfrm>
           <a:prstGeom prst="rect">
             <a:avLst/>
@@ -3407,7 +4621,7 @@
                 <a:ea typeface="Arial" pitchFamily="34" charset="-122"/>
                 <a:cs typeface="Arial" pitchFamily="34" charset="-120"/>
               </a:rPr>
-              <a:t>– Day 1 baseline sheet (returned to each student). – Stopwatch.</a:t>
+              <a:t>By the end of this lesson, students will retest their Day 1 baseline problem (73 × 11) using the trick, complete a paired speed race, and finish Part B of the formative quiz.</a:t>
             </a:r>
             <a:endParaRPr lang="en-US" sz="1200" dirty="0"/>
           </a:p>
@@ -3416,166 +4630,6 @@
       <p:sp>
         <p:nvSpPr>
           <p:cNvPr id="5" name="Text 3"/>
-          <p:cNvSpPr/>
-          <p:nvPr/>
-        </p:nvSpPr>
-        <p:spPr>
-          <a:xfrm>
-            <a:off x="634901" y="1173063"/>
-            <a:ext cx="8102798" cy="300930"/>
-          </a:xfrm>
-          <a:prstGeom prst="rect">
-            <a:avLst/>
-          </a:prstGeom>
-          <a:noFill/>
-          <a:ln/>
-        </p:spPr>
-        <p:txBody>
-          <a:bodyPr wrap="square" lIns="0" tIns="0" rIns="0" bIns="0" rtlCol="0" anchor="t"/>
-          <a:lstStyle/>
-          <a:p>
-            <a:pPr algn="l" marL="342900" indent="-342900">
-              <a:lnSpc>
-                <a:spcPts val="1620"/>
-              </a:lnSpc>
-              <a:spcAft>
-                <a:spcPts val="300"/>
-              </a:spcAft>
-              <a:buSzPct val="100000"/>
-              <a:buChar char="•"/>
-            </a:pPr>
-            <a:r>
-              <a:rPr lang="en-US" sz="1200" dirty="0">
-                <a:solidFill>
-                  <a:srgbClr val="1C2833"/>
-                </a:solidFill>
-                <a:latin typeface="Arial" pitchFamily="34" charset="0"/>
-                <a:ea typeface="Arial" pitchFamily="34" charset="-122"/>
-                <a:cs typeface="Arial" pitchFamily="34" charset="-120"/>
-              </a:rPr>
-              <a:t>activities/activity-01-speed-race.md</a:t>
-            </a:r>
-            <a:pPr algn="l" indent="0" marL="0">
-              <a:lnSpc>
-                <a:spcPts val="1620"/>
-              </a:lnSpc>
-              <a:spcAft>
-                <a:spcPts val="300"/>
-              </a:spcAft>
-              <a:buNone/>
-            </a:pPr>
-            <a:r>
-              <a:rPr lang="en-US" sz="1200" dirty="0">
-                <a:solidFill>
-                  <a:srgbClr val="1C2833"/>
-                </a:solidFill>
-                <a:latin typeface="Arial" pitchFamily="34" charset="0"/>
-                <a:ea typeface="Arial" pitchFamily="34" charset="-122"/>
-                <a:cs typeface="Arial" pitchFamily="34" charset="-120"/>
-              </a:rPr>
-              <a:t> worksheet.</a:t>
-            </a:r>
-            <a:endParaRPr lang="en-US" sz="1200" dirty="0"/>
-          </a:p>
-        </p:txBody>
-      </p:sp>
-      <p:sp>
-        <p:nvSpPr>
-          <p:cNvPr id="6" name="Text 4"/>
-          <p:cNvSpPr/>
-          <p:nvPr/>
-        </p:nvSpPr>
-        <p:spPr>
-          <a:xfrm>
-            <a:off x="406301" y="1562844"/>
-            <a:ext cx="8498026" cy="222796"/>
-          </a:xfrm>
-          <a:prstGeom prst="rect">
-            <a:avLst/>
-          </a:prstGeom>
-          <a:noFill/>
-          <a:ln/>
-        </p:spPr>
-        <p:txBody>
-          <a:bodyPr wrap="square" lIns="0" tIns="0" rIns="0" bIns="0" rtlCol="0" anchor="t"/>
-          <a:lstStyle/>
-          <a:p>
-            <a:pPr algn="l" indent="0" marL="0">
-              <a:lnSpc>
-                <a:spcPts val="1680"/>
-              </a:lnSpc>
-              <a:spcBef>
-                <a:spcPts val="300"/>
-              </a:spcBef>
-              <a:spcAft>
-                <a:spcPts val="300"/>
-              </a:spcAft>
-              <a:buNone/>
-            </a:pPr>
-            <a:r>
-              <a:rPr lang="en-US" sz="1200" dirty="0">
-                <a:solidFill>
-                  <a:srgbClr val="1C2833"/>
-                </a:solidFill>
-                <a:latin typeface="Arial" pitchFamily="34" charset="0"/>
-                <a:ea typeface="Arial" pitchFamily="34" charset="-122"/>
-                <a:cs typeface="Arial" pitchFamily="34" charset="-120"/>
-              </a:rPr>
-              <a:t>– Formative quiz Part B (</a:t>
-            </a:r>
-            <a:pPr algn="l" indent="0" marL="0">
-              <a:lnSpc>
-                <a:spcPts val="1680"/>
-              </a:lnSpc>
-              <a:spcBef>
-                <a:spcPts val="300"/>
-              </a:spcBef>
-              <a:spcAft>
-                <a:spcPts val="300"/>
-              </a:spcAft>
-              <a:buNone/>
-            </a:pPr>
-            <a:r>
-              <a:rPr lang="en-US" sz="1200" dirty="0">
-                <a:solidFill>
-                  <a:srgbClr val="1C2833"/>
-                </a:solidFill>
-                <a:latin typeface="Arial" pitchFamily="34" charset="0"/>
-                <a:ea typeface="Arial" pitchFamily="34" charset="-122"/>
-                <a:cs typeface="Arial" pitchFamily="34" charset="-120"/>
-              </a:rPr>
-              <a:t>quizzes/formative.md</a:t>
-            </a:r>
-            <a:pPr algn="l" indent="0" marL="0">
-              <a:lnSpc>
-                <a:spcPts val="1680"/>
-              </a:lnSpc>
-              <a:spcBef>
-                <a:spcPts val="300"/>
-              </a:spcBef>
-              <a:spcAft>
-                <a:spcPts val="300"/>
-              </a:spcAft>
-              <a:buNone/>
-            </a:pPr>
-            <a:r>
-              <a:rPr lang="en-US" sz="1200" dirty="0">
-                <a:solidFill>
-                  <a:srgbClr val="1C2833"/>
-                </a:solidFill>
-                <a:latin typeface="Arial" pitchFamily="34" charset="0"/>
-                <a:ea typeface="Arial" pitchFamily="34" charset="-122"/>
-                <a:cs typeface="Arial" pitchFamily="34" charset="-120"/>
-              </a:rPr>
-              <a:t>).</a:t>
-            </a:r>
-            <a:endParaRPr lang="en-US" sz="1200" dirty="0"/>
-          </a:p>
-        </p:txBody>
-      </p:sp>
-      <p:sp>
-        <p:nvSpPr>
-          <p:cNvPr id="7" name="Text 5"/>
           <p:cNvSpPr/>
           <p:nvPr/>
         </p:nvSpPr>
@@ -3725,7 +4779,7 @@
                 <a:ea typeface="Georgia" pitchFamily="34" charset="-122"/>
                 <a:cs typeface="Georgia" pitchFamily="34" charset="-120"/>
               </a:rPr>
-              <a:t>Lesson flow</a:t>
+              <a:t>Materials</a:t>
             </a:r>
             <a:endParaRPr lang="en-US" sz="1800" dirty="0"/>
           </a:p>
@@ -3734,6 +4788,184 @@
       <p:sp>
         <p:nvSpPr>
           <p:cNvPr id="4" name="Text 2"/>
+          <p:cNvSpPr/>
+          <p:nvPr/>
+        </p:nvSpPr>
+        <p:spPr>
+          <a:xfrm>
+            <a:off x="634901" y="883593"/>
+            <a:ext cx="8102798" cy="1051322"/>
+          </a:xfrm>
+          <a:prstGeom prst="rect">
+            <a:avLst/>
+          </a:prstGeom>
+          <a:noFill/>
+          <a:ln/>
+        </p:spPr>
+        <p:txBody>
+          <a:bodyPr wrap="square" lIns="0" tIns="0" rIns="0" bIns="0" rtlCol="0" anchor="t"/>
+          <a:lstStyle/>
+          <a:p>
+            <a:pPr algn="l" marL="342900" indent="-342900">
+              <a:lnSpc>
+                <a:spcPts val="1620"/>
+              </a:lnSpc>
+              <a:spcAft>
+                <a:spcPts val="300"/>
+              </a:spcAft>
+              <a:buSzPct val="100000"/>
+              <a:buChar char="•"/>
+            </a:pPr>
+            <a:r>
+              <a:rPr lang="en-US" sz="1200" dirty="0">
+                <a:solidFill>
+                  <a:srgbClr val="1C2833"/>
+                </a:solidFill>
+                <a:latin typeface="Arial" pitchFamily="34" charset="0"/>
+                <a:ea typeface="Arial" pitchFamily="34" charset="-122"/>
+                <a:cs typeface="Arial" pitchFamily="34" charset="-120"/>
+              </a:rPr>
+              <a:t>Day 1 baseline sheet (returned to each student).</a:t>
+            </a:r>
+            <a:endParaRPr lang="en-US" sz="1200" dirty="0"/>
+          </a:p>
+          <a:p>
+            <a:pPr algn="l" marL="342900" indent="-342900">
+              <a:lnSpc>
+                <a:spcPts val="1620"/>
+              </a:lnSpc>
+              <a:spcAft>
+                <a:spcPts val="300"/>
+              </a:spcAft>
+              <a:buSzPct val="100000"/>
+              <a:buChar char="•"/>
+            </a:pPr>
+            <a:r>
+              <a:rPr lang="en-US" sz="1200" dirty="0">
+                <a:solidFill>
+                  <a:srgbClr val="1C2833"/>
+                </a:solidFill>
+                <a:latin typeface="Arial" pitchFamily="34" charset="0"/>
+                <a:ea typeface="Arial" pitchFamily="34" charset="-122"/>
+                <a:cs typeface="Arial" pitchFamily="34" charset="-120"/>
+              </a:rPr>
+              <a:t>Stopwatch.</a:t>
+            </a:r>
+            <a:endParaRPr lang="en-US" sz="1200" dirty="0"/>
+          </a:p>
+          <a:p>
+            <a:pPr algn="l" marL="342900" indent="-342900">
+              <a:lnSpc>
+                <a:spcPts val="1620"/>
+              </a:lnSpc>
+              <a:spcAft>
+                <a:spcPts val="300"/>
+              </a:spcAft>
+              <a:buSzPct val="100000"/>
+              <a:buChar char="•"/>
+            </a:pPr>
+            <a:r>
+              <a:rPr lang="en-US" sz="1200" dirty="0">
+                <a:solidFill>
+                  <a:srgbClr val="1C2833"/>
+                </a:solidFill>
+                <a:latin typeface="Arial" pitchFamily="34" charset="0"/>
+                <a:ea typeface="Arial" pitchFamily="34" charset="-122"/>
+                <a:cs typeface="Arial" pitchFamily="34" charset="-120"/>
+              </a:rPr>
+              <a:t>activities/activity-01-speed-race.md</a:t>
+            </a:r>
+            <a:pPr algn="l" indent="0" marL="0">
+              <a:lnSpc>
+                <a:spcPts val="1620"/>
+              </a:lnSpc>
+              <a:spcAft>
+                <a:spcPts val="300"/>
+              </a:spcAft>
+              <a:buNone/>
+            </a:pPr>
+            <a:r>
+              <a:rPr lang="en-US" sz="1200" dirty="0">
+                <a:solidFill>
+                  <a:srgbClr val="1C2833"/>
+                </a:solidFill>
+                <a:latin typeface="Arial" pitchFamily="34" charset="0"/>
+                <a:ea typeface="Arial" pitchFamily="34" charset="-122"/>
+                <a:cs typeface="Arial" pitchFamily="34" charset="-120"/>
+              </a:rPr>
+              <a:t> worksheet.</a:t>
+            </a:r>
+            <a:endParaRPr lang="en-US" sz="1200" dirty="0"/>
+          </a:p>
+          <a:p>
+            <a:pPr algn="l" marL="342900" indent="-342900">
+              <a:lnSpc>
+                <a:spcPts val="1620"/>
+              </a:lnSpc>
+              <a:spcAft>
+                <a:spcPts val="300"/>
+              </a:spcAft>
+              <a:buSzPct val="100000"/>
+              <a:buChar char="•"/>
+            </a:pPr>
+            <a:r>
+              <a:rPr lang="en-US" sz="1200" dirty="0">
+                <a:solidFill>
+                  <a:srgbClr val="1C2833"/>
+                </a:solidFill>
+                <a:latin typeface="Arial" pitchFamily="34" charset="0"/>
+                <a:ea typeface="Arial" pitchFamily="34" charset="-122"/>
+                <a:cs typeface="Arial" pitchFamily="34" charset="-120"/>
+              </a:rPr>
+              <a:t>Formative quiz Part B (</a:t>
+            </a:r>
+            <a:pPr algn="l" indent="0" marL="0">
+              <a:lnSpc>
+                <a:spcPts val="1620"/>
+              </a:lnSpc>
+              <a:spcAft>
+                <a:spcPts val="300"/>
+              </a:spcAft>
+              <a:buNone/>
+            </a:pPr>
+            <a:r>
+              <a:rPr lang="en-US" sz="1200" dirty="0">
+                <a:solidFill>
+                  <a:srgbClr val="1C2833"/>
+                </a:solidFill>
+                <a:latin typeface="Arial" pitchFamily="34" charset="0"/>
+                <a:ea typeface="Arial" pitchFamily="34" charset="-122"/>
+                <a:cs typeface="Arial" pitchFamily="34" charset="-120"/>
+              </a:rPr>
+              <a:t>quizzes/formative.md</a:t>
+            </a:r>
+            <a:pPr algn="l" indent="0" marL="0">
+              <a:lnSpc>
+                <a:spcPts val="1620"/>
+              </a:lnSpc>
+              <a:spcAft>
+                <a:spcPts val="300"/>
+              </a:spcAft>
+              <a:buNone/>
+            </a:pPr>
+            <a:r>
+              <a:rPr lang="en-US" sz="1200" dirty="0">
+                <a:solidFill>
+                  <a:srgbClr val="1C2833"/>
+                </a:solidFill>
+                <a:latin typeface="Arial" pitchFamily="34" charset="0"/>
+                <a:ea typeface="Arial" pitchFamily="34" charset="-122"/>
+                <a:cs typeface="Arial" pitchFamily="34" charset="-120"/>
+              </a:rPr>
+              <a:t>).</a:t>
+            </a:r>
+            <a:endParaRPr lang="en-US" sz="1200" dirty="0"/>
+          </a:p>
+        </p:txBody>
+      </p:sp>
+      <p:sp>
+        <p:nvSpPr>
+          <p:cNvPr id="5" name="Text 3"/>
           <p:cNvSpPr/>
           <p:nvPr/>
         </p:nvSpPr>
@@ -3883,7 +5115,7 @@
                 <a:ea typeface="Georgia" pitchFamily="34" charset="-122"/>
                 <a:cs typeface="Georgia" pitchFamily="34" charset="-120"/>
               </a:rPr>
-              <a:t>Warm-up (3 min)</a:t>
+              <a:t>Lesson flow</a:t>
             </a:r>
             <a:endParaRPr lang="en-US" sz="1800" dirty="0"/>
           </a:p>
@@ -3892,54 +5124,6 @@
       <p:sp>
         <p:nvSpPr>
           <p:cNvPr id="4" name="Text 2"/>
-          <p:cNvSpPr/>
-          <p:nvPr/>
-        </p:nvSpPr>
-        <p:spPr>
-          <a:xfrm>
-            <a:off x="406301" y="870942"/>
-            <a:ext cx="8498026" cy="213271"/>
-          </a:xfrm>
-          <a:prstGeom prst="rect">
-            <a:avLst/>
-          </a:prstGeom>
-          <a:noFill/>
-          <a:ln/>
-        </p:spPr>
-        <p:txBody>
-          <a:bodyPr wrap="square" lIns="0" tIns="0" rIns="0" bIns="0" rtlCol="0" anchor="t"/>
-          <a:lstStyle/>
-          <a:p>
-            <a:pPr algn="l" indent="0" marL="0">
-              <a:lnSpc>
-                <a:spcPts val="1680"/>
-              </a:lnSpc>
-              <a:spcBef>
-                <a:spcPts val="300"/>
-              </a:spcBef>
-              <a:spcAft>
-                <a:spcPts val="300"/>
-              </a:spcAft>
-              <a:buNone/>
-            </a:pPr>
-            <a:r>
-              <a:rPr lang="en-US" sz="1200" dirty="0">
-                <a:solidFill>
-                  <a:srgbClr val="1C2833"/>
-                </a:solidFill>
-                <a:latin typeface="Arial" pitchFamily="34" charset="0"/>
-                <a:ea typeface="Arial" pitchFamily="34" charset="-122"/>
-                <a:cs typeface="Arial" pitchFamily="34" charset="-120"/>
-              </a:rPr>
-              <a:t>– Quick chorus: 12 problems, mixed 2- and 3-digit × 11. Cover the carry case.</a:t>
-            </a:r>
-            <a:endParaRPr lang="en-US" sz="1200" dirty="0"/>
-          </a:p>
-        </p:txBody>
-      </p:sp>
-      <p:sp>
-        <p:nvSpPr>
-          <p:cNvPr id="5" name="Text 3"/>
           <p:cNvSpPr/>
           <p:nvPr/>
         </p:nvSpPr>
@@ -4089,7 +5273,7 @@
                 <a:ea typeface="Georgia" pitchFamily="34" charset="-122"/>
                 <a:cs typeface="Georgia" pitchFamily="34" charset="-120"/>
               </a:rPr>
-              <a:t>Day 1 retest (5 min)</a:t>
+              <a:t>Warm-up (3 min)</a:t>
             </a:r>
             <a:endParaRPr lang="en-US" sz="1800" dirty="0"/>
           </a:p>
@@ -4103,8 +5287,8 @@
         </p:nvSpPr>
         <p:spPr>
           <a:xfrm>
-            <a:off x="406301" y="870942"/>
-            <a:ext cx="8498026" cy="213271"/>
+            <a:off x="634901" y="883593"/>
+            <a:ext cx="8102798" cy="281880"/>
           </a:xfrm>
           <a:prstGeom prst="rect">
             <a:avLst/>
@@ -4116,17 +5300,15 @@
           <a:bodyPr wrap="square" lIns="0" tIns="0" rIns="0" bIns="0" rtlCol="0" anchor="t"/>
           <a:lstStyle/>
           <a:p>
-            <a:pPr algn="l" indent="0" marL="0">
-              <a:lnSpc>
-                <a:spcPts val="1680"/>
-              </a:lnSpc>
-              <a:spcBef>
-                <a:spcPts val="300"/>
-              </a:spcBef>
-              <a:spcAft>
-                <a:spcPts val="300"/>
-              </a:spcAft>
-              <a:buNone/>
+            <a:pPr algn="l" marL="342900" indent="-342900">
+              <a:lnSpc>
+                <a:spcPts val="1620"/>
+              </a:lnSpc>
+              <a:spcAft>
+                <a:spcPts val="300"/>
+              </a:spcAft>
+              <a:buSzPct val="100000"/>
+              <a:buChar char="•"/>
             </a:pPr>
             <a:r>
               <a:rPr lang="en-US" sz="1200" dirty="0">
@@ -4137,53 +5319,7 @@
                 <a:ea typeface="Arial" pitchFamily="34" charset="-122"/>
                 <a:cs typeface="Arial" pitchFamily="34" charset="-120"/>
               </a:rPr>
-              <a:t>– Return Day 1 baseline sheet to each student. – Re-solve </a:t>
-            </a:r>
-            <a:pPr algn="l" indent="0" marL="0">
-              <a:lnSpc>
-                <a:spcPts val="1680"/>
-              </a:lnSpc>
-              <a:spcBef>
-                <a:spcPts val="300"/>
-              </a:spcBef>
-              <a:spcAft>
-                <a:spcPts val="300"/>
-              </a:spcAft>
-              <a:buNone/>
-            </a:pPr>
-            <a:r>
-              <a:rPr lang="en-US" sz="1200" b="1" dirty="0">
-                <a:solidFill>
-                  <a:srgbClr val="1C2833"/>
-                </a:solidFill>
-                <a:latin typeface="Arial" pitchFamily="34" charset="0"/>
-                <a:ea typeface="Arial" pitchFamily="34" charset="-122"/>
-                <a:cs typeface="Arial" pitchFamily="34" charset="-120"/>
-              </a:rPr>
-              <a:t>73 × 11</a:t>
-            </a:r>
-            <a:pPr algn="l" indent="0" marL="0">
-              <a:lnSpc>
-                <a:spcPts val="1680"/>
-              </a:lnSpc>
-              <a:spcBef>
-                <a:spcPts val="300"/>
-              </a:spcBef>
-              <a:spcAft>
-                <a:spcPts val="300"/>
-              </a:spcAft>
-              <a:buNone/>
-            </a:pPr>
-            <a:r>
-              <a:rPr lang="en-US" sz="1200" dirty="0">
-                <a:solidFill>
-                  <a:srgbClr val="1C2833"/>
-                </a:solidFill>
-                <a:latin typeface="Arial" pitchFamily="34" charset="0"/>
-                <a:ea typeface="Arial" pitchFamily="34" charset="-122"/>
-                <a:cs typeface="Arial" pitchFamily="34" charset="-120"/>
-              </a:rPr>
-              <a:t> using the trick. Time yourself. – Record:</a:t>
+              <a:t>Quick chorus: 12 problems, mixed 2- and 3-digit × 11. Cover the carry case.</a:t>
             </a:r>
             <a:endParaRPr lang="en-US" sz="1200" dirty="0"/>
           </a:p>
@@ -4192,233 +5328,6 @@
       <p:sp>
         <p:nvSpPr>
           <p:cNvPr id="5" name="Text 3"/>
-          <p:cNvSpPr/>
-          <p:nvPr/>
-        </p:nvSpPr>
-        <p:spPr>
-          <a:xfrm>
-            <a:off x="406301" y="1173063"/>
-            <a:ext cx="8331398" cy="777627"/>
-          </a:xfrm>
-          <a:prstGeom prst="rect">
-            <a:avLst/>
-          </a:prstGeom>
-          <a:solidFill>
-            <a:srgbClr val="F4F8F9"/>
-          </a:solidFill>
-          <a:ln/>
-        </p:spPr>
-        <p:txBody>
-          <a:bodyPr wrap="square" rtlCol="0" anchor="ctr"/>
-          <a:lstStyle/>
-          <a:p>
-            <a:pPr indent="0" marL="0">
-              <a:buNone/>
-            </a:pPr>
-            <a:endParaRPr lang="en-US" dirty="0"/>
-          </a:p>
-        </p:txBody>
-      </p:sp>
-      <p:sp>
-        <p:nvSpPr>
-          <p:cNvPr id="6" name="Shape 4"/>
-          <p:cNvSpPr/>
-          <p:nvPr/>
-        </p:nvSpPr>
-        <p:spPr>
-          <a:xfrm>
-            <a:off x="430113" y="1173063"/>
-            <a:ext cx="0" cy="777627"/>
-          </a:xfrm>
-          <a:prstGeom prst="line">
-            <a:avLst/>
-          </a:prstGeom>
-          <a:noFill/>
-          <a:ln w="47625">
-            <a:solidFill>
-              <a:srgbClr val="277884"/>
-            </a:solidFill>
-            <a:prstDash val="solid"/>
-          </a:ln>
-        </p:spPr>
-      </p:sp>
-      <p:sp>
-        <p:nvSpPr>
-          <p:cNvPr id="7" name="Text 5"/>
-          <p:cNvSpPr/>
-          <p:nvPr/>
-        </p:nvSpPr>
-        <p:spPr>
-          <a:xfrm>
-            <a:off x="631627" y="1300014"/>
-            <a:ext cx="8086939" cy="174575"/>
-          </a:xfrm>
-          <a:prstGeom prst="rect">
-            <a:avLst/>
-          </a:prstGeom>
-          <a:noFill/>
-          <a:ln/>
-        </p:spPr>
-        <p:txBody>
-          <a:bodyPr wrap="square" lIns="0" tIns="0" rIns="0" bIns="0" rtlCol="0" anchor="t"/>
-          <a:lstStyle/>
-          <a:p>
-            <a:pPr algn="l" indent="0" marL="0">
-              <a:lnSpc>
-                <a:spcPts val="1375"/>
-              </a:lnSpc>
-              <a:buNone/>
-            </a:pPr>
-            <a:r>
-              <a:rPr lang="en-US" sz="1100" dirty="0">
-                <a:solidFill>
-                  <a:srgbClr val="1C2833"/>
-                </a:solidFill>
-                <a:latin typeface="Courier New" pitchFamily="34" charset="0"/>
-                <a:ea typeface="Courier New" pitchFamily="34" charset="-122"/>
-                <a:cs typeface="Courier New" pitchFamily="34" charset="-120"/>
-              </a:rPr>
-              <a:t>Day 1 time (long multiplication): ____ sec</a:t>
-            </a:r>
-            <a:endParaRPr lang="en-US" sz="1100" dirty="0"/>
-          </a:p>
-        </p:txBody>
-      </p:sp>
-      <p:sp>
-        <p:nvSpPr>
-          <p:cNvPr id="8" name="Text 6"/>
-          <p:cNvSpPr/>
-          <p:nvPr/>
-        </p:nvSpPr>
-        <p:spPr>
-          <a:xfrm>
-            <a:off x="631627" y="1474589"/>
-            <a:ext cx="8086939" cy="174575"/>
-          </a:xfrm>
-          <a:prstGeom prst="rect">
-            <a:avLst/>
-          </a:prstGeom>
-          <a:noFill/>
-          <a:ln/>
-        </p:spPr>
-        <p:txBody>
-          <a:bodyPr wrap="square" lIns="0" tIns="0" rIns="0" bIns="0" rtlCol="0" anchor="t"/>
-          <a:lstStyle/>
-          <a:p>
-            <a:pPr algn="l" indent="0" marL="0">
-              <a:lnSpc>
-                <a:spcPts val="1375"/>
-              </a:lnSpc>
-              <a:buNone/>
-            </a:pPr>
-            <a:r>
-              <a:rPr lang="en-US" sz="1100" dirty="0">
-                <a:solidFill>
-                  <a:srgbClr val="1C2833"/>
-                </a:solidFill>
-                <a:latin typeface="Courier New" pitchFamily="34" charset="0"/>
-                <a:ea typeface="Courier New" pitchFamily="34" charset="-122"/>
-                <a:cs typeface="Courier New" pitchFamily="34" charset="-120"/>
-              </a:rPr>
-              <a:t>Day 5 time (×11 trick):           ____ sec</a:t>
-            </a:r>
-            <a:endParaRPr lang="en-US" sz="1100" dirty="0"/>
-          </a:p>
-        </p:txBody>
-      </p:sp>
-      <p:sp>
-        <p:nvSpPr>
-          <p:cNvPr id="9" name="Text 7"/>
-          <p:cNvSpPr/>
-          <p:nvPr/>
-        </p:nvSpPr>
-        <p:spPr>
-          <a:xfrm>
-            <a:off x="631627" y="1649164"/>
-            <a:ext cx="8086939" cy="174575"/>
-          </a:xfrm>
-          <a:prstGeom prst="rect">
-            <a:avLst/>
-          </a:prstGeom>
-          <a:noFill/>
-          <a:ln/>
-        </p:spPr>
-        <p:txBody>
-          <a:bodyPr wrap="square" lIns="0" tIns="0" rIns="0" bIns="0" rtlCol="0" anchor="t"/>
-          <a:lstStyle/>
-          <a:p>
-            <a:pPr algn="l" indent="0" marL="0">
-              <a:lnSpc>
-                <a:spcPts val="1375"/>
-              </a:lnSpc>
-              <a:buNone/>
-            </a:pPr>
-            <a:r>
-              <a:rPr lang="en-US" sz="1100" dirty="0">
-                <a:solidFill>
-                  <a:srgbClr val="1C2833"/>
-                </a:solidFill>
-                <a:latin typeface="Courier New" pitchFamily="34" charset="0"/>
-                <a:ea typeface="Courier New" pitchFamily="34" charset="-122"/>
-                <a:cs typeface="Courier New" pitchFamily="34" charset="-120"/>
-              </a:rPr>
-              <a:t>Improvement:                      ____ %</a:t>
-            </a:r>
-            <a:endParaRPr lang="en-US" sz="1100" dirty="0"/>
-          </a:p>
-        </p:txBody>
-      </p:sp>
-      <p:sp>
-        <p:nvSpPr>
-          <p:cNvPr id="10" name="Text 8"/>
-          <p:cNvSpPr/>
-          <p:nvPr/>
-        </p:nvSpPr>
-        <p:spPr>
-          <a:xfrm>
-            <a:off x="406301" y="2039541"/>
-            <a:ext cx="8498026" cy="213271"/>
-          </a:xfrm>
-          <a:prstGeom prst="rect">
-            <a:avLst/>
-          </a:prstGeom>
-          <a:noFill/>
-          <a:ln/>
-        </p:spPr>
-        <p:txBody>
-          <a:bodyPr wrap="square" lIns="0" tIns="0" rIns="0" bIns="0" rtlCol="0" anchor="t"/>
-          <a:lstStyle/>
-          <a:p>
-            <a:pPr algn="l" indent="0" marL="0">
-              <a:lnSpc>
-                <a:spcPts val="1680"/>
-              </a:lnSpc>
-              <a:spcBef>
-                <a:spcPts val="300"/>
-              </a:spcBef>
-              <a:spcAft>
-                <a:spcPts val="300"/>
-              </a:spcAft>
-              <a:buNone/>
-            </a:pPr>
-            <a:r>
-              <a:rPr lang="en-US" sz="1200" dirty="0">
-                <a:solidFill>
-                  <a:srgbClr val="1C2833"/>
-                </a:solidFill>
-                <a:latin typeface="Arial" pitchFamily="34" charset="0"/>
-                <a:ea typeface="Arial" pitchFamily="34" charset="-122"/>
-                <a:cs typeface="Arial" pitchFamily="34" charset="-120"/>
-              </a:rPr>
-              <a:t>– Most students will see &gt;70% reduction (e.g. 25 sec → 5 sec).</a:t>
-            </a:r>
-            <a:endParaRPr lang="en-US" sz="1200" dirty="0"/>
-          </a:p>
-        </p:txBody>
-      </p:sp>
-      <p:sp>
-        <p:nvSpPr>
-          <p:cNvPr id="11" name="Text 9"/>
           <p:cNvSpPr/>
           <p:nvPr/>
         </p:nvSpPr>
@@ -4568,7 +5477,7 @@
                 <a:ea typeface="Georgia" pitchFamily="34" charset="-122"/>
                 <a:cs typeface="Georgia" pitchFamily="34" charset="-120"/>
               </a:rPr>
-              <a:t>Activity (20 min) — Paired speed race</a:t>
+              <a:t>Day 1 retest (5 min)</a:t>
             </a:r>
             <a:endParaRPr lang="en-US" sz="1800" dirty="0"/>
           </a:p>
@@ -4582,8 +5491,8 @@
         </p:nvSpPr>
         <p:spPr>
           <a:xfrm>
-            <a:off x="406301" y="870942"/>
-            <a:ext cx="8498026" cy="222796"/>
+            <a:off x="634901" y="883593"/>
+            <a:ext cx="8102798" cy="769441"/>
           </a:xfrm>
           <a:prstGeom prst="rect">
             <a:avLst/>
@@ -4595,17 +5504,15 @@
           <a:bodyPr wrap="square" lIns="0" tIns="0" rIns="0" bIns="0" rtlCol="0" anchor="t"/>
           <a:lstStyle/>
           <a:p>
-            <a:pPr algn="l" indent="0" marL="0">
-              <a:lnSpc>
-                <a:spcPts val="1680"/>
-              </a:lnSpc>
-              <a:spcBef>
-                <a:spcPts val="300"/>
-              </a:spcBef>
-              <a:spcAft>
-                <a:spcPts val="300"/>
-              </a:spcAft>
-              <a:buNone/>
+            <a:pPr algn="l" marL="342900" indent="-342900">
+              <a:lnSpc>
+                <a:spcPts val="1620"/>
+              </a:lnSpc>
+              <a:spcAft>
+                <a:spcPts val="300"/>
+              </a:spcAft>
+              <a:buSzPct val="100000"/>
+              <a:buChar char="•"/>
             </a:pPr>
             <a:r>
               <a:rPr lang="en-US" sz="1200" dirty="0">
@@ -4616,19 +5523,20 @@
                 <a:ea typeface="Arial" pitchFamily="34" charset="-122"/>
                 <a:cs typeface="Arial" pitchFamily="34" charset="-120"/>
               </a:rPr>
-              <a:t>See </a:t>
-            </a:r>
-            <a:pPr algn="l" indent="0" marL="0">
-              <a:lnSpc>
-                <a:spcPts val="1680"/>
-              </a:lnSpc>
-              <a:spcBef>
-                <a:spcPts val="300"/>
-              </a:spcBef>
-              <a:spcAft>
-                <a:spcPts val="300"/>
-              </a:spcAft>
-              <a:buNone/>
+              <a:t>Return Day 1 baseline sheet to each student.</a:t>
+            </a:r>
+            <a:endParaRPr lang="en-US" sz="1200" dirty="0"/>
+          </a:p>
+          <a:p>
+            <a:pPr algn="l" marL="342900" indent="-342900">
+              <a:lnSpc>
+                <a:spcPts val="1620"/>
+              </a:lnSpc>
+              <a:spcAft>
+                <a:spcPts val="300"/>
+              </a:spcAft>
+              <a:buSzPct val="100000"/>
+              <a:buChar char="•"/>
             </a:pPr>
             <a:r>
               <a:rPr lang="en-US" sz="1200" dirty="0">
@@ -4639,22 +5547,19 @@
                 <a:ea typeface="Arial" pitchFamily="34" charset="-122"/>
                 <a:cs typeface="Arial" pitchFamily="34" charset="-120"/>
               </a:rPr>
-              <a:t>activities/activity-01-speed-race.md</a:t>
+              <a:t>Re-solve </a:t>
             </a:r>
             <a:pPr algn="l" indent="0" marL="0">
               <a:lnSpc>
-                <a:spcPts val="1680"/>
-              </a:lnSpc>
-              <a:spcBef>
-                <a:spcPts val="300"/>
-              </a:spcBef>
-              <a:spcAft>
-                <a:spcPts val="300"/>
-              </a:spcAft>
-              <a:buNone/>
-            </a:pPr>
-            <a:r>
-              <a:rPr lang="en-US" sz="1200" dirty="0">
+                <a:spcPts val="1620"/>
+              </a:lnSpc>
+              <a:spcAft>
+                <a:spcPts val="300"/>
+              </a:spcAft>
+              <a:buNone/>
+            </a:pPr>
+            <a:r>
+              <a:rPr lang="en-US" sz="1200" b="1" dirty="0">
                 <a:solidFill>
                   <a:srgbClr val="1C2833"/>
                 </a:solidFill>
@@ -4662,40 +5567,12 @@
                 <a:ea typeface="Arial" pitchFamily="34" charset="-122"/>
                 <a:cs typeface="Arial" pitchFamily="34" charset="-120"/>
               </a:rPr>
-              <a:t> for the full set-up.</a:t>
-            </a:r>
-            <a:endParaRPr lang="en-US" sz="1200" dirty="0"/>
-          </a:p>
-        </p:txBody>
-      </p:sp>
-      <p:sp>
-        <p:nvSpPr>
-          <p:cNvPr id="5" name="Text 3"/>
-          <p:cNvSpPr/>
-          <p:nvPr/>
-        </p:nvSpPr>
-        <p:spPr>
-          <a:xfrm>
-            <a:off x="406301" y="1169938"/>
-            <a:ext cx="8498026" cy="853083"/>
-          </a:xfrm>
-          <a:prstGeom prst="rect">
-            <a:avLst/>
-          </a:prstGeom>
-          <a:noFill/>
-          <a:ln/>
-        </p:spPr>
-        <p:txBody>
-          <a:bodyPr wrap="square" lIns="0" tIns="0" rIns="0" bIns="0" rtlCol="0" anchor="t"/>
-          <a:lstStyle/>
-          <a:p>
+              <a:t>73 × 11</a:t>
+            </a:r>
             <a:pPr algn="l" indent="0" marL="0">
               <a:lnSpc>
-                <a:spcPts val="1680"/>
-              </a:lnSpc>
-              <a:spcBef>
-                <a:spcPts val="300"/>
-              </a:spcBef>
+                <a:spcPts val="1620"/>
+              </a:lnSpc>
               <a:spcAft>
                 <a:spcPts val="300"/>
               </a:spcAft>
@@ -4710,15 +5587,39 @@
                 <a:ea typeface="Arial" pitchFamily="34" charset="-122"/>
                 <a:cs typeface="Arial" pitchFamily="34" charset="-120"/>
               </a:rPr>
-              <a:t>– Round 1 (5 min): Solo, 20 mixed-difficulty problems. Each problem on a flashcard. – Round 2 (5 min): Paired. Partner reads problem; you answer aloud. – Round 3 (5 min): Group chorus — teacher displays 10 problems; class shouts the answer. – Round 4 (5 min): Quick-fire — teacher calls a 2-digit number; first student to call back the ×11 product gets a tally mark. (Light competition; no cumulative score across days.)</a:t>
+              <a:t> using the trick. Time yourself.</a:t>
             </a:r>
             <a:endParaRPr lang="en-US" sz="1200" dirty="0"/>
           </a:p>
-        </p:txBody>
-      </p:sp>
-      <p:sp>
-        <p:nvSpPr>
-          <p:cNvPr id="6" name="Text 4"/>
+          <a:p>
+            <a:pPr algn="l" marL="342900" indent="-342900">
+              <a:lnSpc>
+                <a:spcPts val="1620"/>
+              </a:lnSpc>
+              <a:spcAft>
+                <a:spcPts val="300"/>
+              </a:spcAft>
+              <a:buSzPct val="100000"/>
+              <a:buChar char="•"/>
+            </a:pPr>
+            <a:r>
+              <a:rPr lang="en-US" sz="1200" dirty="0">
+                <a:solidFill>
+                  <a:srgbClr val="1C2833"/>
+                </a:solidFill>
+                <a:latin typeface="Arial" pitchFamily="34" charset="0"/>
+                <a:ea typeface="Arial" pitchFamily="34" charset="-122"/>
+                <a:cs typeface="Arial" pitchFamily="34" charset="-120"/>
+              </a:rPr>
+              <a:t>Record:</a:t>
+            </a:r>
+            <a:endParaRPr lang="en-US" sz="1200" dirty="0"/>
+          </a:p>
+        </p:txBody>
+      </p:sp>
+      <p:sp>
+        <p:nvSpPr>
+          <p:cNvPr id="5" name="Text 3"/>
           <p:cNvSpPr/>
           <p:nvPr/>
         </p:nvSpPr>
@@ -4868,7 +5769,7 @@
                 <a:ea typeface="Georgia" pitchFamily="34" charset="-122"/>
                 <a:cs typeface="Georgia" pitchFamily="34" charset="-120"/>
               </a:rPr>
-              <a:t>Formative Quiz Part B (15 min)</a:t>
+              <a:t>Day 1 retest (5 min) (cont.)</a:t>
             </a:r>
             <a:endParaRPr lang="en-US" sz="1800" dirty="0"/>
           </a:p>
@@ -4882,13 +5783,66 @@
         </p:nvSpPr>
         <p:spPr>
           <a:xfrm>
-            <a:off x="406301" y="870942"/>
-            <a:ext cx="8498026" cy="213271"/>
-          </a:xfrm>
-          <a:prstGeom prst="rect">
+            <a:off x="406301" y="883593"/>
+            <a:ext cx="8331398" cy="777627"/>
+          </a:xfrm>
+          <a:prstGeom prst="rect">
+            <a:avLst/>
+          </a:prstGeom>
+          <a:solidFill>
+            <a:srgbClr val="F4F8F9"/>
+          </a:solidFill>
+          <a:ln/>
+        </p:spPr>
+        <p:txBody>
+          <a:bodyPr wrap="square" rtlCol="0" anchor="ctr"/>
+          <a:lstStyle/>
+          <a:p>
+            <a:pPr indent="0" marL="0">
+              <a:buNone/>
+            </a:pPr>
+            <a:endParaRPr lang="en-US" dirty="0"/>
+          </a:p>
+        </p:txBody>
+      </p:sp>
+      <p:sp>
+        <p:nvSpPr>
+          <p:cNvPr id="5" name="Shape 3"/>
+          <p:cNvSpPr/>
+          <p:nvPr/>
+        </p:nvSpPr>
+        <p:spPr>
+          <a:xfrm>
+            <a:off x="430113" y="883593"/>
+            <a:ext cx="0" cy="777627"/>
+          </a:xfrm>
+          <a:prstGeom prst="line">
             <a:avLst/>
           </a:prstGeom>
           <a:noFill/>
+          <a:ln w="47625">
+            <a:solidFill>
+              <a:srgbClr val="277884"/>
+            </a:solidFill>
+            <a:prstDash val="solid"/>
+          </a:ln>
+        </p:spPr>
+      </p:sp>
+      <p:sp>
+        <p:nvSpPr>
+          <p:cNvPr id="6" name="Text 4"/>
+          <p:cNvSpPr/>
+          <p:nvPr/>
+        </p:nvSpPr>
+        <p:spPr>
+          <a:xfrm>
+            <a:off x="631627" y="1010543"/>
+            <a:ext cx="8086939" cy="174575"/>
+          </a:xfrm>
+          <a:prstGeom prst="rect">
+            <a:avLst/>
+          </a:prstGeom>
+          <a:noFill/>
           <a:ln/>
         </p:spPr>
         <p:txBody>
@@ -4897,15 +5851,139 @@
           <a:p>
             <a:pPr algn="l" indent="0" marL="0">
               <a:lnSpc>
-                <a:spcPts val="1680"/>
-              </a:lnSpc>
-              <a:spcBef>
-                <a:spcPts val="300"/>
-              </a:spcBef>
-              <a:spcAft>
-                <a:spcPts val="300"/>
-              </a:spcAft>
-              <a:buNone/>
+                <a:spcPts val="1375"/>
+              </a:lnSpc>
+              <a:buNone/>
+            </a:pPr>
+            <a:r>
+              <a:rPr lang="en-US" sz="1100" dirty="0">
+                <a:solidFill>
+                  <a:srgbClr val="1C2833"/>
+                </a:solidFill>
+                <a:latin typeface="Courier New" pitchFamily="34" charset="0"/>
+                <a:ea typeface="Courier New" pitchFamily="34" charset="-122"/>
+                <a:cs typeface="Courier New" pitchFamily="34" charset="-120"/>
+              </a:rPr>
+              <a:t>Day 1 time (long multiplication): ____ sec</a:t>
+            </a:r>
+            <a:endParaRPr lang="en-US" sz="1100" dirty="0"/>
+          </a:p>
+        </p:txBody>
+      </p:sp>
+      <p:sp>
+        <p:nvSpPr>
+          <p:cNvPr id="7" name="Text 5"/>
+          <p:cNvSpPr/>
+          <p:nvPr/>
+        </p:nvSpPr>
+        <p:spPr>
+          <a:xfrm>
+            <a:off x="631627" y="1185118"/>
+            <a:ext cx="8086939" cy="174575"/>
+          </a:xfrm>
+          <a:prstGeom prst="rect">
+            <a:avLst/>
+          </a:prstGeom>
+          <a:noFill/>
+          <a:ln/>
+        </p:spPr>
+        <p:txBody>
+          <a:bodyPr wrap="square" lIns="0" tIns="0" rIns="0" bIns="0" rtlCol="0" anchor="t"/>
+          <a:lstStyle/>
+          <a:p>
+            <a:pPr algn="l" indent="0" marL="0">
+              <a:lnSpc>
+                <a:spcPts val="1375"/>
+              </a:lnSpc>
+              <a:buNone/>
+            </a:pPr>
+            <a:r>
+              <a:rPr lang="en-US" sz="1100" dirty="0">
+                <a:solidFill>
+                  <a:srgbClr val="1C2833"/>
+                </a:solidFill>
+                <a:latin typeface="Courier New" pitchFamily="34" charset="0"/>
+                <a:ea typeface="Courier New" pitchFamily="34" charset="-122"/>
+                <a:cs typeface="Courier New" pitchFamily="34" charset="-120"/>
+              </a:rPr>
+              <a:t>Day 5 time (×11 trick):           ____ sec</a:t>
+            </a:r>
+            <a:endParaRPr lang="en-US" sz="1100" dirty="0"/>
+          </a:p>
+        </p:txBody>
+      </p:sp>
+      <p:sp>
+        <p:nvSpPr>
+          <p:cNvPr id="8" name="Text 6"/>
+          <p:cNvSpPr/>
+          <p:nvPr/>
+        </p:nvSpPr>
+        <p:spPr>
+          <a:xfrm>
+            <a:off x="631627" y="1359694"/>
+            <a:ext cx="8086939" cy="174575"/>
+          </a:xfrm>
+          <a:prstGeom prst="rect">
+            <a:avLst/>
+          </a:prstGeom>
+          <a:noFill/>
+          <a:ln/>
+        </p:spPr>
+        <p:txBody>
+          <a:bodyPr wrap="square" lIns="0" tIns="0" rIns="0" bIns="0" rtlCol="0" anchor="t"/>
+          <a:lstStyle/>
+          <a:p>
+            <a:pPr algn="l" indent="0" marL="0">
+              <a:lnSpc>
+                <a:spcPts val="1375"/>
+              </a:lnSpc>
+              <a:buNone/>
+            </a:pPr>
+            <a:r>
+              <a:rPr lang="en-US" sz="1100" dirty="0">
+                <a:solidFill>
+                  <a:srgbClr val="1C2833"/>
+                </a:solidFill>
+                <a:latin typeface="Courier New" pitchFamily="34" charset="0"/>
+                <a:ea typeface="Courier New" pitchFamily="34" charset="-122"/>
+                <a:cs typeface="Courier New" pitchFamily="34" charset="-120"/>
+              </a:rPr>
+              <a:t>Improvement:                      ____ %</a:t>
+            </a:r>
+            <a:endParaRPr lang="en-US" sz="1100" dirty="0"/>
+          </a:p>
+        </p:txBody>
+      </p:sp>
+      <p:sp>
+        <p:nvSpPr>
+          <p:cNvPr id="9" name="Text 7"/>
+          <p:cNvSpPr/>
+          <p:nvPr/>
+        </p:nvSpPr>
+        <p:spPr>
+          <a:xfrm>
+            <a:off x="634901" y="1762720"/>
+            <a:ext cx="8102798" cy="281880"/>
+          </a:xfrm>
+          <a:prstGeom prst="rect">
+            <a:avLst/>
+          </a:prstGeom>
+          <a:noFill/>
+          <a:ln/>
+        </p:spPr>
+        <p:txBody>
+          <a:bodyPr wrap="square" lIns="0" tIns="0" rIns="0" bIns="0" rtlCol="0" anchor="t"/>
+          <a:lstStyle/>
+          <a:p>
+            <a:pPr algn="l" marL="342900" indent="-342900">
+              <a:lnSpc>
+                <a:spcPts val="1620"/>
+              </a:lnSpc>
+              <a:spcAft>
+                <a:spcPts val="300"/>
+              </a:spcAft>
+              <a:buSzPct val="100000"/>
+              <a:buChar char="•"/>
             </a:pPr>
             <a:r>
               <a:rPr lang="en-US" sz="1200" dirty="0">
@@ -4916,7 +5994,7 @@
                 <a:ea typeface="Arial" pitchFamily="34" charset="-122"/>
                 <a:cs typeface="Arial" pitchFamily="34" charset="-120"/>
               </a:rPr>
-              <a:t>– Distribute Part B. – 8 questions, mixed 2- and 3-digit × 11, plus 2 short-answer "explain why" items.</a:t>
+              <a:t>Most students will see &gt;70% reduction (e.g. 25 sec → 5 sec).</a:t>
             </a:r>
             <a:endParaRPr lang="en-US" sz="1200" dirty="0"/>
           </a:p>
@@ -4924,7 +6002,7 @@
       </p:sp>
       <p:sp>
         <p:nvSpPr>
-          <p:cNvPr id="5" name="Text 3"/>
+          <p:cNvPr id="10" name="Text 8"/>
           <p:cNvSpPr/>
           <p:nvPr/>
         </p:nvSpPr>
@@ -5074,7 +6152,7 @@
                 <a:ea typeface="Georgia" pitchFamily="34" charset="-122"/>
                 <a:cs typeface="Georgia" pitchFamily="34" charset="-120"/>
               </a:rPr>
-              <a:t>Wrap-up (2 min)</a:t>
+              <a:t>Activity (20 min) — Paired speed race</a:t>
             </a:r>
             <a:endParaRPr lang="en-US" sz="1800" dirty="0"/>
           </a:p>
@@ -5089,7 +6167,7 @@
         <p:spPr>
           <a:xfrm>
             <a:off x="406301" y="870942"/>
-            <a:ext cx="8498026" cy="426541"/>
+            <a:ext cx="8498026" cy="222796"/>
           </a:xfrm>
           <a:prstGeom prst="rect">
             <a:avLst/>
@@ -5122,7 +6200,7 @@
                 <a:ea typeface="Arial" pitchFamily="34" charset="-122"/>
                 <a:cs typeface="Arial" pitchFamily="34" charset="-120"/>
               </a:rPr>
-              <a:t>– Preview Day 6: </a:t>
+              <a:t>See </a:t>
             </a:r>
             <a:pPr algn="l" indent="0" marL="0">
               <a:lnSpc>
@@ -5137,7 +6215,7 @@
               <a:buNone/>
             </a:pPr>
             <a:r>
-              <a:rPr lang="en-US" sz="1200" i="1" dirty="0">
+              <a:rPr lang="en-US" sz="1200" dirty="0">
                 <a:solidFill>
                   <a:srgbClr val="1C2833"/>
                 </a:solidFill>
@@ -5145,7 +6223,30 @@
                 <a:ea typeface="Arial" pitchFamily="34" charset="-122"/>
                 <a:cs typeface="Arial" pitchFamily="34" charset="-120"/>
               </a:rPr>
-              <a:t>"Tomorrow — the trick extends to ×12, ×13, … all the way to ×19. The middle-add step scales by a multiplier."</a:t>
+              <a:t>activities/activity-01-speed-race.md</a:t>
+            </a:r>
+            <a:pPr algn="l" indent="0" marL="0">
+              <a:lnSpc>
+                <a:spcPts val="1680"/>
+              </a:lnSpc>
+              <a:spcBef>
+                <a:spcPts val="300"/>
+              </a:spcBef>
+              <a:spcAft>
+                <a:spcPts val="300"/>
+              </a:spcAft>
+              <a:buNone/>
+            </a:pPr>
+            <a:r>
+              <a:rPr lang="en-US" sz="1200" dirty="0">
+                <a:solidFill>
+                  <a:srgbClr val="1C2833"/>
+                </a:solidFill>
+                <a:latin typeface="Arial" pitchFamily="34" charset="0"/>
+                <a:ea typeface="Arial" pitchFamily="34" charset="-122"/>
+                <a:cs typeface="Arial" pitchFamily="34" charset="-120"/>
+              </a:rPr>
+              <a:t> for the full set-up.</a:t>
             </a:r>
             <a:endParaRPr lang="en-US" sz="1200" dirty="0"/>
           </a:p>
@@ -5303,7 +6404,7 @@
                 <a:ea typeface="Georgia" pitchFamily="34" charset="-122"/>
                 <a:cs typeface="Georgia" pitchFamily="34" charset="-120"/>
               </a:rPr>
-              <a:t>Student-facing content</a:t>
+              <a:t>Activity (20 min) — Paired speed race (cont.)</a:t>
             </a:r>
             <a:endParaRPr lang="en-US" sz="1800" dirty="0"/>
           </a:p>
@@ -5317,246 +6418,119 @@
         </p:nvSpPr>
         <p:spPr>
           <a:xfrm>
-            <a:off x="406301" y="883593"/>
-            <a:ext cx="8331398" cy="1650206"/>
-          </a:xfrm>
-          <a:prstGeom prst="rect">
-            <a:avLst/>
-          </a:prstGeom>
-          <a:solidFill>
-            <a:srgbClr val="F4F8F9"/>
-          </a:solidFill>
-          <a:ln/>
-        </p:spPr>
-        <p:txBody>
-          <a:bodyPr wrap="square" rtlCol="0" anchor="ctr"/>
-          <a:lstStyle/>
-          <a:p>
-            <a:pPr indent="0" marL="0">
-              <a:buNone/>
-            </a:pPr>
-            <a:endParaRPr lang="en-US" dirty="0"/>
-          </a:p>
-        </p:txBody>
-      </p:sp>
-      <p:sp>
-        <p:nvSpPr>
-          <p:cNvPr id="5" name="Shape 3"/>
-          <p:cNvSpPr/>
-          <p:nvPr/>
-        </p:nvSpPr>
-        <p:spPr>
-          <a:xfrm>
-            <a:off x="434876" y="883593"/>
-            <a:ext cx="0" cy="1650206"/>
-          </a:xfrm>
-          <a:prstGeom prst="line">
+            <a:off x="634901" y="883593"/>
+            <a:ext cx="8102798" cy="1218902"/>
+          </a:xfrm>
+          <a:prstGeom prst="rect">
             <a:avLst/>
           </a:prstGeom>
           <a:noFill/>
-          <a:ln w="57150">
-            <a:solidFill>
-              <a:srgbClr val="FE4447"/>
-            </a:solidFill>
-            <a:prstDash val="solid"/>
-          </a:ln>
-        </p:spPr>
-      </p:sp>
-      <p:sp>
-        <p:nvSpPr>
-          <p:cNvPr id="6" name="Text 4"/>
-          <p:cNvSpPr/>
-          <p:nvPr/>
-        </p:nvSpPr>
-        <p:spPr>
-          <a:xfrm>
-            <a:off x="692051" y="1074093"/>
-            <a:ext cx="7973389" cy="230981"/>
-          </a:xfrm>
-          <a:prstGeom prst="rect">
-            <a:avLst/>
-          </a:prstGeom>
-          <a:noFill/>
           <a:ln/>
         </p:spPr>
         <p:txBody>
           <a:bodyPr wrap="square" lIns="0" tIns="0" rIns="0" bIns="0" rtlCol="0" anchor="t"/>
           <a:lstStyle/>
           <a:p>
-            <a:pPr algn="l" indent="0" marL="0">
-              <a:lnSpc>
-                <a:spcPts val="1820"/>
-              </a:lnSpc>
-              <a:spcBef>
-                <a:spcPts val="300"/>
-              </a:spcBef>
-              <a:spcAft>
-                <a:spcPts val="300"/>
-              </a:spcAft>
-              <a:buNone/>
-            </a:pPr>
-            <a:r>
-              <a:rPr lang="en-US" sz="1300" b="1" i="1" dirty="0">
+            <a:pPr algn="l" marL="342900" indent="-342900">
+              <a:lnSpc>
+                <a:spcPts val="1620"/>
+              </a:lnSpc>
+              <a:spcAft>
+                <a:spcPts val="300"/>
+              </a:spcAft>
+              <a:buSzPct val="100000"/>
+              <a:buChar char="•"/>
+            </a:pPr>
+            <a:r>
+              <a:rPr lang="en-US" sz="1200" dirty="0">
                 <a:solidFill>
                   <a:srgbClr val="1C2833"/>
                 </a:solidFill>
-                <a:latin typeface="Georgia" pitchFamily="34" charset="0"/>
-                <a:ea typeface="Georgia" pitchFamily="34" charset="-122"/>
-                <a:cs typeface="Georgia" pitchFamily="34" charset="-120"/>
-              </a:rPr>
-              <a:t>Speed Day</a:t>
-            </a:r>
-            <a:endParaRPr lang="en-US" sz="1300" dirty="0"/>
-          </a:p>
-        </p:txBody>
-      </p:sp>
-      <p:sp>
-        <p:nvSpPr>
-          <p:cNvPr id="7" name="Text 5"/>
-          <p:cNvSpPr/>
-          <p:nvPr/>
-        </p:nvSpPr>
-        <p:spPr>
-          <a:xfrm>
-            <a:off x="692051" y="1343174"/>
-            <a:ext cx="7973389" cy="230981"/>
-          </a:xfrm>
-          <a:prstGeom prst="rect">
-            <a:avLst/>
-          </a:prstGeom>
-          <a:noFill/>
-          <a:ln/>
-        </p:spPr>
-        <p:txBody>
-          <a:bodyPr wrap="square" lIns="0" tIns="0" rIns="0" bIns="0" rtlCol="0" anchor="t"/>
-          <a:lstStyle/>
-          <a:p>
-            <a:pPr algn="l" indent="0" marL="0">
-              <a:lnSpc>
-                <a:spcPts val="1820"/>
-              </a:lnSpc>
-              <a:spcBef>
-                <a:spcPts val="300"/>
-              </a:spcBef>
-              <a:spcAft>
-                <a:spcPts val="300"/>
-              </a:spcAft>
-              <a:buNone/>
-            </a:pPr>
-            <a:r>
-              <a:rPr lang="en-US" sz="1300" i="1" dirty="0">
+                <a:latin typeface="Arial" pitchFamily="34" charset="0"/>
+                <a:ea typeface="Arial" pitchFamily="34" charset="-122"/>
+                <a:cs typeface="Arial" pitchFamily="34" charset="-120"/>
+              </a:rPr>
+              <a:t>Round 1 (5 min): Solo, 20 mixed-difficulty problems. Each problem on a flashcard.</a:t>
+            </a:r>
+            <a:endParaRPr lang="en-US" sz="1200" dirty="0"/>
+          </a:p>
+          <a:p>
+            <a:pPr algn="l" marL="342900" indent="-342900">
+              <a:lnSpc>
+                <a:spcPts val="1620"/>
+              </a:lnSpc>
+              <a:spcAft>
+                <a:spcPts val="300"/>
+              </a:spcAft>
+              <a:buSzPct val="100000"/>
+              <a:buChar char="•"/>
+            </a:pPr>
+            <a:r>
+              <a:rPr lang="en-US" sz="1200" dirty="0">
                 <a:solidFill>
                   <a:srgbClr val="1C2833"/>
                 </a:solidFill>
-                <a:latin typeface="Georgia" pitchFamily="34" charset="0"/>
-                <a:ea typeface="Georgia" pitchFamily="34" charset="-122"/>
-                <a:cs typeface="Georgia" pitchFamily="34" charset="-120"/>
-              </a:rPr>
-              <a:t>Today's question: how much faster has your mental ×11 gotten in 4 days?</a:t>
-            </a:r>
-            <a:endParaRPr lang="en-US" sz="1300" dirty="0"/>
-          </a:p>
-        </p:txBody>
-      </p:sp>
-      <p:sp>
-        <p:nvSpPr>
-          <p:cNvPr id="8" name="Text 6"/>
-          <p:cNvSpPr/>
-          <p:nvPr/>
-        </p:nvSpPr>
-        <p:spPr>
-          <a:xfrm>
-            <a:off x="692051" y="1612255"/>
-            <a:ext cx="7973389" cy="230981"/>
-          </a:xfrm>
-          <a:prstGeom prst="rect">
-            <a:avLst/>
-          </a:prstGeom>
-          <a:noFill/>
-          <a:ln/>
-        </p:spPr>
-        <p:txBody>
-          <a:bodyPr wrap="square" lIns="0" tIns="0" rIns="0" bIns="0" rtlCol="0" anchor="t"/>
-          <a:lstStyle/>
-          <a:p>
-            <a:pPr algn="l" indent="0" marL="0">
-              <a:lnSpc>
-                <a:spcPts val="1820"/>
-              </a:lnSpc>
-              <a:spcBef>
-                <a:spcPts val="300"/>
-              </a:spcBef>
-              <a:spcAft>
-                <a:spcPts val="300"/>
-              </a:spcAft>
-              <a:buNone/>
-            </a:pPr>
-            <a:r>
-              <a:rPr lang="en-US" sz="1300" i="1" dirty="0">
+                <a:latin typeface="Arial" pitchFamily="34" charset="0"/>
+                <a:ea typeface="Arial" pitchFamily="34" charset="-122"/>
+                <a:cs typeface="Arial" pitchFamily="34" charset="-120"/>
+              </a:rPr>
+              <a:t>Round 2 (5 min): Paired. Partner reads problem; you answer aloud.</a:t>
+            </a:r>
+            <a:endParaRPr lang="en-US" sz="1200" dirty="0"/>
+          </a:p>
+          <a:p>
+            <a:pPr algn="l" marL="342900" indent="-342900">
+              <a:lnSpc>
+                <a:spcPts val="1620"/>
+              </a:lnSpc>
+              <a:spcAft>
+                <a:spcPts val="300"/>
+              </a:spcAft>
+              <a:buSzPct val="100000"/>
+              <a:buChar char="•"/>
+            </a:pPr>
+            <a:r>
+              <a:rPr lang="en-US" sz="1200" dirty="0">
                 <a:solidFill>
                   <a:srgbClr val="1C2833"/>
                 </a:solidFill>
-                <a:latin typeface="Georgia" pitchFamily="34" charset="0"/>
-                <a:ea typeface="Georgia" pitchFamily="34" charset="-122"/>
-                <a:cs typeface="Georgia" pitchFamily="34" charset="-120"/>
-              </a:rPr>
-              <a:t>Record your Day 5 retest time. Compare with Day 1. The gap is the proof of practice.</a:t>
-            </a:r>
-            <a:endParaRPr lang="en-US" sz="1300" dirty="0"/>
-          </a:p>
-        </p:txBody>
-      </p:sp>
-      <p:sp>
-        <p:nvSpPr>
-          <p:cNvPr id="9" name="Text 7"/>
-          <p:cNvSpPr/>
-          <p:nvPr/>
-        </p:nvSpPr>
-        <p:spPr>
-          <a:xfrm>
-            <a:off x="692051" y="1881336"/>
-            <a:ext cx="7973389" cy="461963"/>
-          </a:xfrm>
-          <a:prstGeom prst="rect">
-            <a:avLst/>
-          </a:prstGeom>
-          <a:noFill/>
-          <a:ln/>
-        </p:spPr>
-        <p:txBody>
-          <a:bodyPr wrap="square" lIns="0" tIns="0" rIns="0" bIns="0" rtlCol="0" anchor="t"/>
-          <a:lstStyle/>
-          <a:p>
-            <a:pPr algn="l" indent="0" marL="0">
-              <a:lnSpc>
-                <a:spcPts val="1820"/>
-              </a:lnSpc>
-              <a:spcBef>
-                <a:spcPts val="300"/>
-              </a:spcBef>
-              <a:spcAft>
-                <a:spcPts val="300"/>
-              </a:spcAft>
-              <a:buNone/>
-            </a:pPr>
-            <a:r>
-              <a:rPr lang="en-US" sz="1300" i="1" dirty="0">
+                <a:latin typeface="Arial" pitchFamily="34" charset="0"/>
+                <a:ea typeface="Arial" pitchFamily="34" charset="-122"/>
+                <a:cs typeface="Arial" pitchFamily="34" charset="-120"/>
+              </a:rPr>
+              <a:t>Round 3 (5 min): Group chorus — teacher displays 10 problems; class shouts the answer.</a:t>
+            </a:r>
+            <a:endParaRPr lang="en-US" sz="1200" dirty="0"/>
+          </a:p>
+          <a:p>
+            <a:pPr algn="l" marL="342900" indent="-342900">
+              <a:lnSpc>
+                <a:spcPts val="1620"/>
+              </a:lnSpc>
+              <a:spcAft>
+                <a:spcPts val="300"/>
+              </a:spcAft>
+              <a:buSzPct val="100000"/>
+              <a:buChar char="•"/>
+            </a:pPr>
+            <a:r>
+              <a:rPr lang="en-US" sz="1200" dirty="0">
                 <a:solidFill>
                   <a:srgbClr val="1C2833"/>
                 </a:solidFill>
-                <a:latin typeface="Georgia" pitchFamily="34" charset="0"/>
-                <a:ea typeface="Georgia" pitchFamily="34" charset="-122"/>
-                <a:cs typeface="Georgia" pitchFamily="34" charset="-120"/>
-              </a:rPr>
-              <a:t>By end of class you should hit roughly: - 2-digit × 11 (no-carry): under 2 seconds - 2-digit × 11 (carry): under 4 seconds - 3-digit × 11: under 8 seconds</a:t>
-            </a:r>
-            <a:endParaRPr lang="en-US" sz="1300" dirty="0"/>
-          </a:p>
-        </p:txBody>
-      </p:sp>
-      <p:sp>
-        <p:nvSpPr>
-          <p:cNvPr id="10" name="Text 8"/>
+                <a:latin typeface="Arial" pitchFamily="34" charset="0"/>
+                <a:ea typeface="Arial" pitchFamily="34" charset="-122"/>
+                <a:cs typeface="Arial" pitchFamily="34" charset="-120"/>
+              </a:rPr>
+              <a:t>Round 4 (5 min): Quick-fire — teacher calls a 2-digit number; first student to call back the ×11 product gets a tally mark. (Light competition; no cumulative score across days.)</a:t>
+            </a:r>
+            <a:endParaRPr lang="en-US" sz="1200" dirty="0"/>
+          </a:p>
+        </p:txBody>
+      </p:sp>
+      <p:sp>
+        <p:nvSpPr>
+          <p:cNvPr id="5" name="Text 3"/>
           <p:cNvSpPr/>
           <p:nvPr/>
         </p:nvSpPr>
